--- a/exports/pptx/lessons/primary-module-11-multiplication-near-base/day-01-make-the-twin.pptx
+++ b/exports/pptx/lessons/primary-module-11-multiplication-near-base/day-01-make-the-twin.pptx
@@ -15,9 +15,12 @@
     <p:sldId id="263" r:id="rId9"/>
     <p:sldId id="264" r:id="rId10"/>
     <p:sldId id="265" r:id="rId11"/>
+    <p:sldId id="266" r:id="rId12"/>
+    <p:sldId id="267" r:id="rId13"/>
+    <p:sldId id="268" r:id="rId14"/>
   </p:sldIdLst>
   <p:notesMasterIdLst>
-    <p:notesMasterId r:id="rId12"/>
+    <p:notesMasterId r:id="rId15"/>
   </p:notesMasterIdLst>
   <p:sldSz cx="9144000" cy="5143500"/>
   <p:notesSz cx="5143500" cy="9144000"/>
@@ -623,6 +626,270 @@
             <a:fld id="{F7021451-1387-4CA6-816F-3879F97B5CBC}" type="slidenum">
               <a:rPr lang="en-US"/>
               <a:t>10</a:t>
+            </a:fld>
+            <a:endParaRPr lang="en-US"/>
+          </a:p>
+        </p:txBody>
+      </p:sp>
+    </p:spTree>
+    <p:extLst>
+      <p:ext uri="{BB962C8B-B14F-4D97-AF65-F5344CB8AC3E}">
+        <p14:creationId xmlns:p14="http://schemas.microsoft.com/office/powerpoint/2010/main" val="1024086991"/>
+      </p:ext>
+    </p:extLst>
+  </p:cSld>
+  <p:clrMapOvr>
+    <a:masterClrMapping/>
+  </p:clrMapOvr>
+</p:notes>
+</file>
+
+<file path=ppt/notesSlides/notesSlide11.xml><?xml version="1.0" encoding="utf-8"?>
+<p:notes xmlns:a="http://schemas.openxmlformats.org/drawingml/2006/main" xmlns:r="http://schemas.openxmlformats.org/officeDocument/2006/relationships" xmlns:p="http://schemas.openxmlformats.org/presentationml/2006/main">
+  <p:cSld>
+    <p:spTree>
+      <p:nvGrpSpPr>
+        <p:cNvPr id="1" name=""/>
+        <p:cNvGrpSpPr/>
+        <p:nvPr/>
+      </p:nvGrpSpPr>
+      <p:grpSpPr>
+        <a:xfrm>
+          <a:off x="0" y="0"/>
+          <a:ext cx="0" cy="0"/>
+          <a:chOff x="0" y="0"/>
+          <a:chExt cx="0" cy="0"/>
+        </a:xfrm>
+      </p:grpSpPr>
+      <p:sp>
+        <p:nvSpPr>
+          <p:cNvPr id="2" name="Slide Image Placeholder 1"/>
+          <p:cNvSpPr>
+            <a:spLocks noGrp="1" noRot="1" noChangeAspect="1"/>
+          </p:cNvSpPr>
+          <p:nvPr>
+            <p:ph type="sldImg"/>
+          </p:nvPr>
+        </p:nvSpPr>
+        <p:spPr/>
+      </p:sp>
+      <p:sp>
+        <p:nvSpPr>
+          <p:cNvPr id="3" name="Notes Placeholder 2"/>
+          <p:cNvSpPr>
+            <a:spLocks noGrp="1"/>
+          </p:cNvSpPr>
+          <p:nvPr>
+            <p:ph type="body" idx="1"/>
+          </p:nvPr>
+        </p:nvSpPr>
+        <p:spPr/>
+        <p:txBody>
+          <a:bodyPr/>
+          <a:lstStyle/>
+          <a:p>
+            <a:r>
+              <a:rPr lang="en-US" dirty="0"/>
+              <a:t/>
+            </a:r>
+            <a:endParaRPr lang="en-US" dirty="0"/>
+          </a:p>
+        </p:txBody>
+      </p:sp>
+      <p:sp>
+        <p:nvSpPr>
+          <p:cNvPr id="4" name="Slide Number Placeholder 3"/>
+          <p:cNvSpPr>
+            <a:spLocks noGrp="1"/>
+          </p:cNvSpPr>
+          <p:nvPr>
+            <p:ph type="sldNum" sz="quarter" idx="10"/>
+          </p:nvPr>
+        </p:nvSpPr>
+        <p:spPr/>
+        <p:txBody>
+          <a:bodyPr/>
+          <a:lstStyle/>
+          <a:p>
+            <a:fld id="{F7021451-1387-4CA6-816F-3879F97B5CBC}" type="slidenum">
+              <a:rPr lang="en-US"/>
+              <a:t>11</a:t>
+            </a:fld>
+            <a:endParaRPr lang="en-US"/>
+          </a:p>
+        </p:txBody>
+      </p:sp>
+    </p:spTree>
+    <p:extLst>
+      <p:ext uri="{BB962C8B-B14F-4D97-AF65-F5344CB8AC3E}">
+        <p14:creationId xmlns:p14="http://schemas.microsoft.com/office/powerpoint/2010/main" val="1024086991"/>
+      </p:ext>
+    </p:extLst>
+  </p:cSld>
+  <p:clrMapOvr>
+    <a:masterClrMapping/>
+  </p:clrMapOvr>
+</p:notes>
+</file>
+
+<file path=ppt/notesSlides/notesSlide12.xml><?xml version="1.0" encoding="utf-8"?>
+<p:notes xmlns:a="http://schemas.openxmlformats.org/drawingml/2006/main" xmlns:r="http://schemas.openxmlformats.org/officeDocument/2006/relationships" xmlns:p="http://schemas.openxmlformats.org/presentationml/2006/main">
+  <p:cSld>
+    <p:spTree>
+      <p:nvGrpSpPr>
+        <p:cNvPr id="1" name=""/>
+        <p:cNvGrpSpPr/>
+        <p:nvPr/>
+      </p:nvGrpSpPr>
+      <p:grpSpPr>
+        <a:xfrm>
+          <a:off x="0" y="0"/>
+          <a:ext cx="0" cy="0"/>
+          <a:chOff x="0" y="0"/>
+          <a:chExt cx="0" cy="0"/>
+        </a:xfrm>
+      </p:grpSpPr>
+      <p:sp>
+        <p:nvSpPr>
+          <p:cNvPr id="2" name="Slide Image Placeholder 1"/>
+          <p:cNvSpPr>
+            <a:spLocks noGrp="1" noRot="1" noChangeAspect="1"/>
+          </p:cNvSpPr>
+          <p:nvPr>
+            <p:ph type="sldImg"/>
+          </p:nvPr>
+        </p:nvSpPr>
+        <p:spPr/>
+      </p:sp>
+      <p:sp>
+        <p:nvSpPr>
+          <p:cNvPr id="3" name="Notes Placeholder 2"/>
+          <p:cNvSpPr>
+            <a:spLocks noGrp="1"/>
+          </p:cNvSpPr>
+          <p:nvPr>
+            <p:ph type="body" idx="1"/>
+          </p:nvPr>
+        </p:nvSpPr>
+        <p:spPr/>
+        <p:txBody>
+          <a:bodyPr/>
+          <a:lstStyle/>
+          <a:p>
+            <a:r>
+              <a:rPr lang="en-US" dirty="0"/>
+              <a:t/>
+            </a:r>
+            <a:endParaRPr lang="en-US" dirty="0"/>
+          </a:p>
+        </p:txBody>
+      </p:sp>
+      <p:sp>
+        <p:nvSpPr>
+          <p:cNvPr id="4" name="Slide Number Placeholder 3"/>
+          <p:cNvSpPr>
+            <a:spLocks noGrp="1"/>
+          </p:cNvSpPr>
+          <p:nvPr>
+            <p:ph type="sldNum" sz="quarter" idx="10"/>
+          </p:nvPr>
+        </p:nvSpPr>
+        <p:spPr/>
+        <p:txBody>
+          <a:bodyPr/>
+          <a:lstStyle/>
+          <a:p>
+            <a:fld id="{F7021451-1387-4CA6-816F-3879F97B5CBC}" type="slidenum">
+              <a:rPr lang="en-US"/>
+              <a:t>12</a:t>
+            </a:fld>
+            <a:endParaRPr lang="en-US"/>
+          </a:p>
+        </p:txBody>
+      </p:sp>
+    </p:spTree>
+    <p:extLst>
+      <p:ext uri="{BB962C8B-B14F-4D97-AF65-F5344CB8AC3E}">
+        <p14:creationId xmlns:p14="http://schemas.microsoft.com/office/powerpoint/2010/main" val="1024086991"/>
+      </p:ext>
+    </p:extLst>
+  </p:cSld>
+  <p:clrMapOvr>
+    <a:masterClrMapping/>
+  </p:clrMapOvr>
+</p:notes>
+</file>
+
+<file path=ppt/notesSlides/notesSlide13.xml><?xml version="1.0" encoding="utf-8"?>
+<p:notes xmlns:a="http://schemas.openxmlformats.org/drawingml/2006/main" xmlns:r="http://schemas.openxmlformats.org/officeDocument/2006/relationships" xmlns:p="http://schemas.openxmlformats.org/presentationml/2006/main">
+  <p:cSld>
+    <p:spTree>
+      <p:nvGrpSpPr>
+        <p:cNvPr id="1" name=""/>
+        <p:cNvGrpSpPr/>
+        <p:nvPr/>
+      </p:nvGrpSpPr>
+      <p:grpSpPr>
+        <a:xfrm>
+          <a:off x="0" y="0"/>
+          <a:ext cx="0" cy="0"/>
+          <a:chOff x="0" y="0"/>
+          <a:chExt cx="0" cy="0"/>
+        </a:xfrm>
+      </p:grpSpPr>
+      <p:sp>
+        <p:nvSpPr>
+          <p:cNvPr id="2" name="Slide Image Placeholder 1"/>
+          <p:cNvSpPr>
+            <a:spLocks noGrp="1" noRot="1" noChangeAspect="1"/>
+          </p:cNvSpPr>
+          <p:nvPr>
+            <p:ph type="sldImg"/>
+          </p:nvPr>
+        </p:nvSpPr>
+        <p:spPr/>
+      </p:sp>
+      <p:sp>
+        <p:nvSpPr>
+          <p:cNvPr id="3" name="Notes Placeholder 2"/>
+          <p:cNvSpPr>
+            <a:spLocks noGrp="1"/>
+          </p:cNvSpPr>
+          <p:nvPr>
+            <p:ph type="body" idx="1"/>
+          </p:nvPr>
+        </p:nvSpPr>
+        <p:spPr/>
+        <p:txBody>
+          <a:bodyPr/>
+          <a:lstStyle/>
+          <a:p>
+            <a:r>
+              <a:rPr lang="en-US" dirty="0"/>
+              <a:t/>
+            </a:r>
+            <a:endParaRPr lang="en-US" dirty="0"/>
+          </a:p>
+        </p:txBody>
+      </p:sp>
+      <p:sp>
+        <p:nvSpPr>
+          <p:cNvPr id="4" name="Slide Number Placeholder 3"/>
+          <p:cNvSpPr>
+            <a:spLocks noGrp="1"/>
+          </p:cNvSpPr>
+          <p:nvPr>
+            <p:ph type="sldNum" sz="quarter" idx="10"/>
+          </p:nvPr>
+        </p:nvSpPr>
+        <p:spPr/>
+        <p:txBody>
+          <a:bodyPr/>
+          <a:lstStyle/>
+          <a:p>
+            <a:fld id="{F7021451-1387-4CA6-816F-3879F97B5CBC}" type="slidenum">
+              <a:rPr lang="en-US"/>
+              <a:t>13</a:t>
             </a:fld>
             <a:endParaRPr lang="en-US"/>
           </a:p>
@@ -1876,102 +2143,6 @@
         </p:nvSpPr>
         <p:spPr>
           <a:xfrm>
-            <a:off x="406301" y="1223963"/>
-            <a:ext cx="8498026" cy="274290"/>
-          </a:xfrm>
-          <a:prstGeom prst="rect">
-            <a:avLst/>
-          </a:prstGeom>
-          <a:noFill/>
-          <a:ln/>
-        </p:spPr>
-        <p:txBody>
-          <a:bodyPr wrap="square" lIns="0" tIns="0" rIns="0" bIns="0" rtlCol="0" anchor="t"/>
-          <a:lstStyle/>
-          <a:p>
-            <a:pPr algn="l" indent="0" marL="0">
-              <a:lnSpc>
-                <a:spcPts val="2160"/>
-              </a:lnSpc>
-              <a:spcBef>
-                <a:spcPts val="600"/>
-              </a:spcBef>
-              <a:spcAft>
-                <a:spcPts val="800"/>
-              </a:spcAft>
-              <a:buNone/>
-            </a:pPr>
-            <a:r>
-              <a:rPr lang="en-US" sz="1800" b="1" dirty="0">
-                <a:solidFill>
-                  <a:srgbClr val="E07A5F"/>
-                </a:solidFill>
-                <a:latin typeface="Georgia" pitchFamily="34" charset="0"/>
-                <a:ea typeface="Georgia" pitchFamily="34" charset="-122"/>
-                <a:cs typeface="Georgia" pitchFamily="34" charset="-120"/>
-              </a:rPr>
-              <a:t>Goal</a:t>
-            </a:r>
-            <a:endParaRPr lang="en-US" sz="1800" dirty="0"/>
-          </a:p>
-        </p:txBody>
-      </p:sp>
-      <p:sp>
-        <p:nvSpPr>
-          <p:cNvPr id="6" name="Text 4"/>
-          <p:cNvSpPr/>
-          <p:nvPr/>
-        </p:nvSpPr>
-        <p:spPr>
-          <a:xfrm>
-            <a:off x="406301" y="1637854"/>
-            <a:ext cx="8498026" cy="213271"/>
-          </a:xfrm>
-          <a:prstGeom prst="rect">
-            <a:avLst/>
-          </a:prstGeom>
-          <a:noFill/>
-          <a:ln/>
-        </p:spPr>
-        <p:txBody>
-          <a:bodyPr wrap="square" lIns="0" tIns="0" rIns="0" bIns="0" rtlCol="0" anchor="t"/>
-          <a:lstStyle/>
-          <a:p>
-            <a:pPr algn="l" indent="0" marL="0">
-              <a:lnSpc>
-                <a:spcPts val="1680"/>
-              </a:lnSpc>
-              <a:spcBef>
-                <a:spcPts val="300"/>
-              </a:spcBef>
-              <a:spcAft>
-                <a:spcPts val="300"/>
-              </a:spcAft>
-              <a:buNone/>
-            </a:pPr>
-            <a:r>
-              <a:rPr lang="en-US" sz="1200" dirty="0">
-                <a:solidFill>
-                  <a:srgbClr val="2C2C2C"/>
-                </a:solidFill>
-                <a:latin typeface="Verdana" pitchFamily="34" charset="0"/>
-                <a:ea typeface="Verdana" pitchFamily="34" charset="-122"/>
-                <a:cs typeface="Verdana" pitchFamily="34" charset="-120"/>
-              </a:rPr>
-              <a:t>Children play a card game finding the "twin" — the partner that makes 10 with each card.</a:t>
-            </a:r>
-            <a:endParaRPr lang="en-US" sz="1200" dirty="0"/>
-          </a:p>
-        </p:txBody>
-      </p:sp>
-      <p:sp>
-        <p:nvSpPr>
-          <p:cNvPr id="7" name="Text 5"/>
-          <p:cNvSpPr/>
-          <p:nvPr/>
-        </p:nvSpPr>
-        <p:spPr>
-          <a:xfrm>
             <a:off x="406301" y="4434929"/>
             <a:ext cx="8498026" cy="213271"/>
           </a:xfrm>
@@ -2116,7 +2287,7 @@
                 <a:ea typeface="Georgia" pitchFamily="34" charset="-122"/>
                 <a:cs typeface="Georgia" pitchFamily="34" charset="-120"/>
               </a:rPr>
-              <a:t>Teacher's quick notes</a:t>
+              <a:t>Show + chant (3 min)</a:t>
             </a:r>
             <a:endParaRPr lang="en-US" sz="1800" dirty="0"/>
           </a:p>
@@ -2130,8 +2301,8 @@
         </p:nvSpPr>
         <p:spPr>
           <a:xfrm>
-            <a:off x="406301" y="870942"/>
-            <a:ext cx="8498026" cy="639812"/>
+            <a:off x="634901" y="883593"/>
+            <a:ext cx="8102798" cy="769441"/>
           </a:xfrm>
           <a:prstGeom prst="rect">
             <a:avLst/>
@@ -2143,17 +2314,15 @@
           <a:bodyPr wrap="square" lIns="0" tIns="0" rIns="0" bIns="0" rtlCol="0" anchor="t"/>
           <a:lstStyle/>
           <a:p>
-            <a:pPr algn="l" indent="0" marL="0">
-              <a:lnSpc>
-                <a:spcPts val="1680"/>
-              </a:lnSpc>
-              <a:spcBef>
-                <a:spcPts val="300"/>
-              </a:spcBef>
-              <a:spcAft>
-                <a:spcPts val="300"/>
-              </a:spcAft>
-              <a:buNone/>
+            <a:pPr algn="l" marL="342900" indent="-342900">
+              <a:lnSpc>
+                <a:spcPts val="1620"/>
+              </a:lnSpc>
+              <a:spcAft>
+                <a:spcPts val="300"/>
+              </a:spcAft>
+              <a:buSzPct val="100000"/>
+              <a:buChar char="•"/>
             </a:pPr>
             <a:r>
               <a:rPr lang="en-US" sz="1200" dirty="0">
@@ -2164,7 +2333,799 @@
                 <a:ea typeface="Verdana" pitchFamily="34" charset="-122"/>
                 <a:cs typeface="Verdana" pitchFamily="34" charset="-120"/>
               </a:rPr>
-              <a:t>– Some children won't find twins and will give up. Pair them with a stronger player as a "team." – The game IS the lesson at this band. Don't add a worksheet. – Note: children who completed Module 5 will be fast at twins. Push them with the "speed challenge" — name the twin in under 1 second.</a:t>
+              <a:t>"Who won a round?" — winner shares ONE twin pair they made.</a:t>
+            </a:r>
+            <a:endParaRPr lang="en-US" sz="1200" dirty="0"/>
+          </a:p>
+          <a:p>
+            <a:pPr algn="l" marL="342900" indent="-342900">
+              <a:lnSpc>
+                <a:spcPts val="1620"/>
+              </a:lnSpc>
+              <a:spcAft>
+                <a:spcPts val="300"/>
+              </a:spcAft>
+              <a:buSzPct val="100000"/>
+              <a:buChar char="•"/>
+            </a:pPr>
+            <a:r>
+              <a:rPr lang="en-US" sz="1200" dirty="0">
+                <a:solidFill>
+                  <a:srgbClr val="2C2C2C"/>
+                </a:solidFill>
+                <a:latin typeface="Verdana" pitchFamily="34" charset="0"/>
+                <a:ea typeface="Verdana" pitchFamily="34" charset="-122"/>
+                <a:cs typeface="Verdana" pitchFamily="34" charset="-120"/>
+              </a:rPr>
+              <a:t>Class chants the pair: </a:t>
+            </a:r>
+            <a:pPr algn="l" indent="0" marL="0">
+              <a:lnSpc>
+                <a:spcPts val="1620"/>
+              </a:lnSpc>
+              <a:spcAft>
+                <a:spcPts val="300"/>
+              </a:spcAft>
+              <a:buNone/>
+            </a:pPr>
+            <a:r>
+              <a:rPr lang="en-US" sz="1200" i="1" dirty="0">
+                <a:solidFill>
+                  <a:srgbClr val="2C2C2C"/>
+                </a:solidFill>
+                <a:latin typeface="Verdana" pitchFamily="34" charset="0"/>
+                <a:ea typeface="Verdana" pitchFamily="34" charset="-122"/>
+                <a:cs typeface="Verdana" pitchFamily="34" charset="-120"/>
+              </a:rPr>
+              <a:t>"6 and 4 make 10!"</a:t>
+            </a:r>
+            <a:endParaRPr lang="en-US" sz="1200" dirty="0"/>
+          </a:p>
+          <a:p>
+            <a:pPr algn="l" marL="342900" indent="-342900">
+              <a:lnSpc>
+                <a:spcPts val="1620"/>
+              </a:lnSpc>
+              <a:spcAft>
+                <a:spcPts val="300"/>
+              </a:spcAft>
+              <a:buSzPct val="100000"/>
+              <a:buChar char="•"/>
+            </a:pPr>
+            <a:r>
+              <a:rPr lang="en-US" sz="1200" dirty="0">
+                <a:solidFill>
+                  <a:srgbClr val="2C2C2C"/>
+                </a:solidFill>
+                <a:latin typeface="Verdana" pitchFamily="34" charset="0"/>
+                <a:ea typeface="Verdana" pitchFamily="34" charset="-122"/>
+                <a:cs typeface="Verdana" pitchFamily="34" charset="-120"/>
+              </a:rPr>
+              <a:t>Close with the daily chant.</a:t>
+            </a:r>
+            <a:endParaRPr lang="en-US" sz="1200" dirty="0"/>
+          </a:p>
+        </p:txBody>
+      </p:sp>
+      <p:sp>
+        <p:nvSpPr>
+          <p:cNvPr id="5" name="Text 3"/>
+          <p:cNvSpPr/>
+          <p:nvPr/>
+        </p:nvSpPr>
+        <p:spPr>
+          <a:xfrm>
+            <a:off x="406301" y="4434929"/>
+            <a:ext cx="8498026" cy="213271"/>
+          </a:xfrm>
+          <a:prstGeom prst="rect">
+            <a:avLst/>
+          </a:prstGeom>
+          <a:noFill/>
+          <a:ln/>
+        </p:spPr>
+        <p:txBody>
+          <a:bodyPr wrap="square" lIns="0" tIns="0" rIns="0" bIns="0" rtlCol="0" anchor="t"/>
+          <a:lstStyle/>
+          <a:p>
+            <a:pPr algn="l" indent="0" marL="0">
+              <a:lnSpc>
+                <a:spcPts val="1680"/>
+              </a:lnSpc>
+              <a:spcBef>
+                <a:spcPts val="300"/>
+              </a:spcBef>
+              <a:spcAft>
+                <a:spcPts val="300"/>
+              </a:spcAft>
+              <a:buNone/>
+            </a:pPr>
+            <a:r>
+              <a:rPr lang="en-US" sz="1200" dirty="0">
+                <a:solidFill>
+                  <a:srgbClr val="2C2C2C"/>
+                </a:solidFill>
+                <a:latin typeface="Verdana" pitchFamily="34" charset="0"/>
+                <a:ea typeface="Verdana" pitchFamily="34" charset="-122"/>
+                <a:cs typeface="Verdana" pitchFamily="34" charset="-120"/>
+              </a:rPr>
+              <a:t>Primary ·  · IKS Curriculum</a:t>
+            </a:r>
+            <a:endParaRPr lang="en-US" sz="1200" dirty="0"/>
+          </a:p>
+        </p:txBody>
+      </p:sp>
+    </p:spTree>
+  </p:cSld>
+  <p:clrMapOvr>
+    <a:masterClrMapping/>
+  </p:clrMapOvr>
+</p:sld>
+</file>
+
+<file path=ppt/slides/slide11.xml><?xml version="1.0" encoding="utf-8"?>
+<p:sld xmlns:a="http://schemas.openxmlformats.org/drawingml/2006/main" xmlns:r="http://schemas.openxmlformats.org/officeDocument/2006/relationships" xmlns:p="http://schemas.openxmlformats.org/presentationml/2006/main">
+  <p:cSld name="Slide 11">
+    <p:bg>
+      <p:bgPr>
+        <a:solidFill>
+          <a:srgbClr val="FAF7F2"/>
+        </a:solidFill>
+      </p:bgPr>
+    </p:bg>
+    <p:spTree>
+      <p:nvGrpSpPr>
+        <p:cNvPr id="1" name=""/>
+        <p:cNvGrpSpPr/>
+        <p:nvPr/>
+      </p:nvGrpSpPr>
+      <p:grpSpPr>
+        <a:xfrm>
+          <a:off x="0" y="0"/>
+          <a:ext cx="0" cy="0"/>
+          <a:chOff x="0" y="0"/>
+          <a:chExt cx="0" cy="0"/>
+        </a:xfrm>
+      </p:grpSpPr>
+      <p:sp>
+        <p:nvSpPr>
+          <p:cNvPr id="2" name="Text 0"/>
+          <p:cNvSpPr/>
+          <p:nvPr/>
+        </p:nvSpPr>
+        <p:spPr>
+          <a:xfrm>
+            <a:off x="0" y="0"/>
+            <a:ext cx="9144000" cy="101501"/>
+          </a:xfrm>
+          <a:prstGeom prst="rect">
+            <a:avLst/>
+          </a:prstGeom>
+          <a:solidFill>
+            <a:srgbClr val="87A96B"/>
+          </a:solidFill>
+          <a:ln/>
+        </p:spPr>
+        <p:txBody>
+          <a:bodyPr wrap="square" rtlCol="0" anchor="ctr"/>
+          <a:lstStyle/>
+          <a:p>
+            <a:pPr indent="0" marL="0">
+              <a:buNone/>
+            </a:pPr>
+            <a:endParaRPr lang="en-US" dirty="0"/>
+          </a:p>
+        </p:txBody>
+      </p:sp>
+      <p:sp>
+        <p:nvSpPr>
+          <p:cNvPr id="3" name="Text 1"/>
+          <p:cNvSpPr/>
+          <p:nvPr/>
+        </p:nvSpPr>
+        <p:spPr>
+          <a:xfrm>
+            <a:off x="406301" y="457051"/>
+            <a:ext cx="8498026" cy="274290"/>
+          </a:xfrm>
+          <a:prstGeom prst="rect">
+            <a:avLst/>
+          </a:prstGeom>
+          <a:noFill/>
+          <a:ln/>
+        </p:spPr>
+        <p:txBody>
+          <a:bodyPr wrap="square" lIns="0" tIns="0" rIns="0" bIns="0" rtlCol="0" anchor="t"/>
+          <a:lstStyle/>
+          <a:p>
+            <a:pPr algn="l" indent="0" marL="0">
+              <a:lnSpc>
+                <a:spcPts val="2160"/>
+              </a:lnSpc>
+              <a:spcBef>
+                <a:spcPts val="600"/>
+              </a:spcBef>
+              <a:spcAft>
+                <a:spcPts val="800"/>
+              </a:spcAft>
+              <a:buNone/>
+            </a:pPr>
+            <a:r>
+              <a:rPr lang="en-US" sz="1800" b="1" dirty="0">
+                <a:solidFill>
+                  <a:srgbClr val="E07A5F"/>
+                </a:solidFill>
+                <a:latin typeface="Georgia" pitchFamily="34" charset="0"/>
+                <a:ea typeface="Georgia" pitchFamily="34" charset="-122"/>
+                <a:cs typeface="Georgia" pitchFamily="34" charset="-120"/>
+              </a:rPr>
+              <a:t>Homework</a:t>
+            </a:r>
+            <a:endParaRPr lang="en-US" sz="1800" dirty="0"/>
+          </a:p>
+        </p:txBody>
+      </p:sp>
+      <p:sp>
+        <p:nvSpPr>
+          <p:cNvPr id="4" name="Text 2"/>
+          <p:cNvSpPr/>
+          <p:nvPr/>
+        </p:nvSpPr>
+        <p:spPr>
+          <a:xfrm>
+            <a:off x="634901" y="883593"/>
+            <a:ext cx="8102798" cy="487561"/>
+          </a:xfrm>
+          <a:prstGeom prst="rect">
+            <a:avLst/>
+          </a:prstGeom>
+          <a:noFill/>
+          <a:ln/>
+        </p:spPr>
+        <p:txBody>
+          <a:bodyPr wrap="square" lIns="0" tIns="0" rIns="0" bIns="0" rtlCol="0" anchor="t"/>
+          <a:lstStyle/>
+          <a:p>
+            <a:pPr algn="l" marL="342900" indent="-342900">
+              <a:lnSpc>
+                <a:spcPts val="1620"/>
+              </a:lnSpc>
+              <a:spcAft>
+                <a:spcPts val="300"/>
+              </a:spcAft>
+              <a:buSzPct val="100000"/>
+              <a:buChar char="•"/>
+            </a:pPr>
+            <a:r>
+              <a:rPr lang="en-US" sz="1200" dirty="0">
+                <a:solidFill>
+                  <a:srgbClr val="2C2C2C"/>
+                </a:solidFill>
+                <a:latin typeface="Verdana" pitchFamily="34" charset="0"/>
+                <a:ea typeface="Verdana" pitchFamily="34" charset="-122"/>
+                <a:cs typeface="Verdana" pitchFamily="34" charset="-120"/>
+              </a:rPr>
+              <a:t>At home, practise the chant with a family member. Win a round of Make the Twin if you can find a partner!</a:t>
+            </a:r>
+            <a:endParaRPr lang="en-US" sz="1200" dirty="0"/>
+          </a:p>
+        </p:txBody>
+      </p:sp>
+      <p:sp>
+        <p:nvSpPr>
+          <p:cNvPr id="5" name="Text 3"/>
+          <p:cNvSpPr/>
+          <p:nvPr/>
+        </p:nvSpPr>
+        <p:spPr>
+          <a:xfrm>
+            <a:off x="406301" y="4434929"/>
+            <a:ext cx="8498026" cy="213271"/>
+          </a:xfrm>
+          <a:prstGeom prst="rect">
+            <a:avLst/>
+          </a:prstGeom>
+          <a:noFill/>
+          <a:ln/>
+        </p:spPr>
+        <p:txBody>
+          <a:bodyPr wrap="square" lIns="0" tIns="0" rIns="0" bIns="0" rtlCol="0" anchor="t"/>
+          <a:lstStyle/>
+          <a:p>
+            <a:pPr algn="l" indent="0" marL="0">
+              <a:lnSpc>
+                <a:spcPts val="1680"/>
+              </a:lnSpc>
+              <a:spcBef>
+                <a:spcPts val="300"/>
+              </a:spcBef>
+              <a:spcAft>
+                <a:spcPts val="300"/>
+              </a:spcAft>
+              <a:buNone/>
+            </a:pPr>
+            <a:r>
+              <a:rPr lang="en-US" sz="1200" dirty="0">
+                <a:solidFill>
+                  <a:srgbClr val="2C2C2C"/>
+                </a:solidFill>
+                <a:latin typeface="Verdana" pitchFamily="34" charset="0"/>
+                <a:ea typeface="Verdana" pitchFamily="34" charset="-122"/>
+                <a:cs typeface="Verdana" pitchFamily="34" charset="-120"/>
+              </a:rPr>
+              <a:t>Primary ·  · IKS Curriculum</a:t>
+            </a:r>
+            <a:endParaRPr lang="en-US" sz="1200" dirty="0"/>
+          </a:p>
+        </p:txBody>
+      </p:sp>
+    </p:spTree>
+  </p:cSld>
+  <p:clrMapOvr>
+    <a:masterClrMapping/>
+  </p:clrMapOvr>
+</p:sld>
+</file>
+
+<file path=ppt/slides/slide12.xml><?xml version="1.0" encoding="utf-8"?>
+<p:sld xmlns:a="http://schemas.openxmlformats.org/drawingml/2006/main" xmlns:r="http://schemas.openxmlformats.org/officeDocument/2006/relationships" xmlns:p="http://schemas.openxmlformats.org/presentationml/2006/main">
+  <p:cSld name="Slide 12">
+    <p:bg>
+      <p:bgPr>
+        <a:solidFill>
+          <a:srgbClr val="FAF7F2"/>
+        </a:solidFill>
+      </p:bgPr>
+    </p:bg>
+    <p:spTree>
+      <p:nvGrpSpPr>
+        <p:cNvPr id="1" name=""/>
+        <p:cNvGrpSpPr/>
+        <p:nvPr/>
+      </p:nvGrpSpPr>
+      <p:grpSpPr>
+        <a:xfrm>
+          <a:off x="0" y="0"/>
+          <a:ext cx="0" cy="0"/>
+          <a:chOff x="0" y="0"/>
+          <a:chExt cx="0" cy="0"/>
+        </a:xfrm>
+      </p:grpSpPr>
+      <p:sp>
+        <p:nvSpPr>
+          <p:cNvPr id="2" name="Text 0"/>
+          <p:cNvSpPr/>
+          <p:nvPr/>
+        </p:nvSpPr>
+        <p:spPr>
+          <a:xfrm>
+            <a:off x="0" y="0"/>
+            <a:ext cx="9144000" cy="101501"/>
+          </a:xfrm>
+          <a:prstGeom prst="rect">
+            <a:avLst/>
+          </a:prstGeom>
+          <a:solidFill>
+            <a:srgbClr val="87A96B"/>
+          </a:solidFill>
+          <a:ln/>
+        </p:spPr>
+        <p:txBody>
+          <a:bodyPr wrap="square" rtlCol="0" anchor="ctr"/>
+          <a:lstStyle/>
+          <a:p>
+            <a:pPr indent="0" marL="0">
+              <a:buNone/>
+            </a:pPr>
+            <a:endParaRPr lang="en-US" dirty="0"/>
+          </a:p>
+        </p:txBody>
+      </p:sp>
+      <p:sp>
+        <p:nvSpPr>
+          <p:cNvPr id="3" name="Text 1"/>
+          <p:cNvSpPr/>
+          <p:nvPr/>
+        </p:nvSpPr>
+        <p:spPr>
+          <a:xfrm>
+            <a:off x="406301" y="457051"/>
+            <a:ext cx="8498026" cy="274290"/>
+          </a:xfrm>
+          <a:prstGeom prst="rect">
+            <a:avLst/>
+          </a:prstGeom>
+          <a:noFill/>
+          <a:ln/>
+        </p:spPr>
+        <p:txBody>
+          <a:bodyPr wrap="square" lIns="0" tIns="0" rIns="0" bIns="0" rtlCol="0" anchor="t"/>
+          <a:lstStyle/>
+          <a:p>
+            <a:pPr algn="l" indent="0" marL="0">
+              <a:lnSpc>
+                <a:spcPts val="2160"/>
+              </a:lnSpc>
+              <a:spcBef>
+                <a:spcPts val="600"/>
+              </a:spcBef>
+              <a:spcAft>
+                <a:spcPts val="800"/>
+              </a:spcAft>
+              <a:buNone/>
+            </a:pPr>
+            <a:r>
+              <a:rPr lang="en-US" sz="1800" b="1" dirty="0">
+                <a:solidFill>
+                  <a:srgbClr val="E07A5F"/>
+                </a:solidFill>
+                <a:latin typeface="Georgia" pitchFamily="34" charset="0"/>
+                <a:ea typeface="Georgia" pitchFamily="34" charset="-122"/>
+                <a:cs typeface="Georgia" pitchFamily="34" charset="-120"/>
+              </a:rPr>
+              <a:t>Differentiation</a:t>
+            </a:r>
+            <a:endParaRPr lang="en-US" sz="1800" dirty="0"/>
+          </a:p>
+        </p:txBody>
+      </p:sp>
+      <p:sp>
+        <p:nvSpPr>
+          <p:cNvPr id="4" name="Text 2"/>
+          <p:cNvSpPr/>
+          <p:nvPr/>
+        </p:nvSpPr>
+        <p:spPr>
+          <a:xfrm>
+            <a:off x="634901" y="883593"/>
+            <a:ext cx="8102798" cy="525661"/>
+          </a:xfrm>
+          <a:prstGeom prst="rect">
+            <a:avLst/>
+          </a:prstGeom>
+          <a:noFill/>
+          <a:ln/>
+        </p:spPr>
+        <p:txBody>
+          <a:bodyPr wrap="square" lIns="0" tIns="0" rIns="0" bIns="0" rtlCol="0" anchor="t"/>
+          <a:lstStyle/>
+          <a:p>
+            <a:pPr algn="l" marL="342900" indent="-342900">
+              <a:lnSpc>
+                <a:spcPts val="1620"/>
+              </a:lnSpc>
+              <a:spcAft>
+                <a:spcPts val="300"/>
+              </a:spcAft>
+              <a:buSzPct val="100000"/>
+              <a:buChar char="•"/>
+            </a:pPr>
+            <a:r>
+              <a:rPr lang="en-US" sz="1200" b="1" dirty="0">
+                <a:solidFill>
+                  <a:srgbClr val="2C2C2C"/>
+                </a:solidFill>
+                <a:latin typeface="Verdana" pitchFamily="34" charset="0"/>
+                <a:ea typeface="Verdana" pitchFamily="34" charset="-122"/>
+                <a:cs typeface="Verdana" pitchFamily="34" charset="-120"/>
+              </a:rPr>
+              <a:t>Tier up:</a:t>
+            </a:r>
+            <a:pPr algn="l" indent="0" marL="0">
+              <a:lnSpc>
+                <a:spcPts val="1620"/>
+              </a:lnSpc>
+              <a:spcAft>
+                <a:spcPts val="300"/>
+              </a:spcAft>
+              <a:buNone/>
+            </a:pPr>
+            <a:r>
+              <a:rPr lang="en-US" sz="1200" dirty="0">
+                <a:solidFill>
+                  <a:srgbClr val="2C2C2C"/>
+                </a:solidFill>
+                <a:latin typeface="Verdana" pitchFamily="34" charset="0"/>
+                <a:ea typeface="Verdana" pitchFamily="34" charset="-122"/>
+                <a:cs typeface="Verdana" pitchFamily="34" charset="-120"/>
+              </a:rPr>
+              <a:t> Add cards 0 and 10. Find twins for those too. (0 + 10. Or just play with 1–9.)</a:t>
+            </a:r>
+            <a:endParaRPr lang="en-US" sz="1200" dirty="0"/>
+          </a:p>
+          <a:p>
+            <a:pPr algn="l" marL="342900" indent="-342900">
+              <a:lnSpc>
+                <a:spcPts val="1620"/>
+              </a:lnSpc>
+              <a:spcAft>
+                <a:spcPts val="300"/>
+              </a:spcAft>
+              <a:buSzPct val="100000"/>
+              <a:buChar char="•"/>
+            </a:pPr>
+            <a:r>
+              <a:rPr lang="en-US" sz="1200" b="1" dirty="0">
+                <a:solidFill>
+                  <a:srgbClr val="2C2C2C"/>
+                </a:solidFill>
+                <a:latin typeface="Verdana" pitchFamily="34" charset="0"/>
+                <a:ea typeface="Verdana" pitchFamily="34" charset="-122"/>
+                <a:cs typeface="Verdana" pitchFamily="34" charset="-120"/>
+              </a:rPr>
+              <a:t>Tier down:</a:t>
+            </a:r>
+            <a:pPr algn="l" indent="0" marL="0">
+              <a:lnSpc>
+                <a:spcPts val="1620"/>
+              </a:lnSpc>
+              <a:spcAft>
+                <a:spcPts val="300"/>
+              </a:spcAft>
+              <a:buNone/>
+            </a:pPr>
+            <a:r>
+              <a:rPr lang="en-US" sz="1200" dirty="0">
+                <a:solidFill>
+                  <a:srgbClr val="2C2C2C"/>
+                </a:solidFill>
+                <a:latin typeface="Verdana" pitchFamily="34" charset="0"/>
+                <a:ea typeface="Verdana" pitchFamily="34" charset="-122"/>
+                <a:cs typeface="Verdana" pitchFamily="34" charset="-120"/>
+              </a:rPr>
+              <a:t> Use only cards 1–6 to keep the twins easy.</a:t>
+            </a:r>
+            <a:endParaRPr lang="en-US" sz="1200" dirty="0"/>
+          </a:p>
+        </p:txBody>
+      </p:sp>
+      <p:sp>
+        <p:nvSpPr>
+          <p:cNvPr id="5" name="Text 3"/>
+          <p:cNvSpPr/>
+          <p:nvPr/>
+        </p:nvSpPr>
+        <p:spPr>
+          <a:xfrm>
+            <a:off x="406301" y="4434929"/>
+            <a:ext cx="8498026" cy="213271"/>
+          </a:xfrm>
+          <a:prstGeom prst="rect">
+            <a:avLst/>
+          </a:prstGeom>
+          <a:noFill/>
+          <a:ln/>
+        </p:spPr>
+        <p:txBody>
+          <a:bodyPr wrap="square" lIns="0" tIns="0" rIns="0" bIns="0" rtlCol="0" anchor="t"/>
+          <a:lstStyle/>
+          <a:p>
+            <a:pPr algn="l" indent="0" marL="0">
+              <a:lnSpc>
+                <a:spcPts val="1680"/>
+              </a:lnSpc>
+              <a:spcBef>
+                <a:spcPts val="300"/>
+              </a:spcBef>
+              <a:spcAft>
+                <a:spcPts val="300"/>
+              </a:spcAft>
+              <a:buNone/>
+            </a:pPr>
+            <a:r>
+              <a:rPr lang="en-US" sz="1200" dirty="0">
+                <a:solidFill>
+                  <a:srgbClr val="2C2C2C"/>
+                </a:solidFill>
+                <a:latin typeface="Verdana" pitchFamily="34" charset="0"/>
+                <a:ea typeface="Verdana" pitchFamily="34" charset="-122"/>
+                <a:cs typeface="Verdana" pitchFamily="34" charset="-120"/>
+              </a:rPr>
+              <a:t>Primary ·  · IKS Curriculum</a:t>
+            </a:r>
+            <a:endParaRPr lang="en-US" sz="1200" dirty="0"/>
+          </a:p>
+        </p:txBody>
+      </p:sp>
+    </p:spTree>
+  </p:cSld>
+  <p:clrMapOvr>
+    <a:masterClrMapping/>
+  </p:clrMapOvr>
+</p:sld>
+</file>
+
+<file path=ppt/slides/slide13.xml><?xml version="1.0" encoding="utf-8"?>
+<p:sld xmlns:a="http://schemas.openxmlformats.org/drawingml/2006/main" xmlns:r="http://schemas.openxmlformats.org/officeDocument/2006/relationships" xmlns:p="http://schemas.openxmlformats.org/presentationml/2006/main">
+  <p:cSld name="Slide 13">
+    <p:bg>
+      <p:bgPr>
+        <a:solidFill>
+          <a:srgbClr val="FAF7F2"/>
+        </a:solidFill>
+      </p:bgPr>
+    </p:bg>
+    <p:spTree>
+      <p:nvGrpSpPr>
+        <p:cNvPr id="1" name=""/>
+        <p:cNvGrpSpPr/>
+        <p:nvPr/>
+      </p:nvGrpSpPr>
+      <p:grpSpPr>
+        <a:xfrm>
+          <a:off x="0" y="0"/>
+          <a:ext cx="0" cy="0"/>
+          <a:chOff x="0" y="0"/>
+          <a:chExt cx="0" cy="0"/>
+        </a:xfrm>
+      </p:grpSpPr>
+      <p:sp>
+        <p:nvSpPr>
+          <p:cNvPr id="2" name="Text 0"/>
+          <p:cNvSpPr/>
+          <p:nvPr/>
+        </p:nvSpPr>
+        <p:spPr>
+          <a:xfrm>
+            <a:off x="0" y="0"/>
+            <a:ext cx="9144000" cy="101501"/>
+          </a:xfrm>
+          <a:prstGeom prst="rect">
+            <a:avLst/>
+          </a:prstGeom>
+          <a:solidFill>
+            <a:srgbClr val="87A96B"/>
+          </a:solidFill>
+          <a:ln/>
+        </p:spPr>
+        <p:txBody>
+          <a:bodyPr wrap="square" rtlCol="0" anchor="ctr"/>
+          <a:lstStyle/>
+          <a:p>
+            <a:pPr indent="0" marL="0">
+              <a:buNone/>
+            </a:pPr>
+            <a:endParaRPr lang="en-US" dirty="0"/>
+          </a:p>
+        </p:txBody>
+      </p:sp>
+      <p:sp>
+        <p:nvSpPr>
+          <p:cNvPr id="3" name="Text 1"/>
+          <p:cNvSpPr/>
+          <p:nvPr/>
+        </p:nvSpPr>
+        <p:spPr>
+          <a:xfrm>
+            <a:off x="406301" y="457051"/>
+            <a:ext cx="8498026" cy="274290"/>
+          </a:xfrm>
+          <a:prstGeom prst="rect">
+            <a:avLst/>
+          </a:prstGeom>
+          <a:noFill/>
+          <a:ln/>
+        </p:spPr>
+        <p:txBody>
+          <a:bodyPr wrap="square" lIns="0" tIns="0" rIns="0" bIns="0" rtlCol="0" anchor="t"/>
+          <a:lstStyle/>
+          <a:p>
+            <a:pPr algn="l" indent="0" marL="0">
+              <a:lnSpc>
+                <a:spcPts val="2160"/>
+              </a:lnSpc>
+              <a:spcBef>
+                <a:spcPts val="600"/>
+              </a:spcBef>
+              <a:spcAft>
+                <a:spcPts val="800"/>
+              </a:spcAft>
+              <a:buNone/>
+            </a:pPr>
+            <a:r>
+              <a:rPr lang="en-US" sz="1800" b="1" dirty="0">
+                <a:solidFill>
+                  <a:srgbClr val="E07A5F"/>
+                </a:solidFill>
+                <a:latin typeface="Georgia" pitchFamily="34" charset="0"/>
+                <a:ea typeface="Georgia" pitchFamily="34" charset="-122"/>
+                <a:cs typeface="Georgia" pitchFamily="34" charset="-120"/>
+              </a:rPr>
+              <a:t>Teacher's quick notes</a:t>
+            </a:r>
+            <a:endParaRPr lang="en-US" sz="1800" dirty="0"/>
+          </a:p>
+        </p:txBody>
+      </p:sp>
+      <p:sp>
+        <p:nvSpPr>
+          <p:cNvPr id="4" name="Text 2"/>
+          <p:cNvSpPr/>
+          <p:nvPr/>
+        </p:nvSpPr>
+        <p:spPr>
+          <a:xfrm>
+            <a:off x="634901" y="883593"/>
+            <a:ext cx="8102798" cy="975122"/>
+          </a:xfrm>
+          <a:prstGeom prst="rect">
+            <a:avLst/>
+          </a:prstGeom>
+          <a:noFill/>
+          <a:ln/>
+        </p:spPr>
+        <p:txBody>
+          <a:bodyPr wrap="square" lIns="0" tIns="0" rIns="0" bIns="0" rtlCol="0" anchor="t"/>
+          <a:lstStyle/>
+          <a:p>
+            <a:pPr algn="l" marL="342900" indent="-342900">
+              <a:lnSpc>
+                <a:spcPts val="1620"/>
+              </a:lnSpc>
+              <a:spcAft>
+                <a:spcPts val="300"/>
+              </a:spcAft>
+              <a:buSzPct val="100000"/>
+              <a:buChar char="•"/>
+            </a:pPr>
+            <a:r>
+              <a:rPr lang="en-US" sz="1200" dirty="0">
+                <a:solidFill>
+                  <a:srgbClr val="2C2C2C"/>
+                </a:solidFill>
+                <a:latin typeface="Verdana" pitchFamily="34" charset="0"/>
+                <a:ea typeface="Verdana" pitchFamily="34" charset="-122"/>
+                <a:cs typeface="Verdana" pitchFamily="34" charset="-120"/>
+              </a:rPr>
+              <a:t>Some children won't find twins and will give up. Pair them with a stronger player as a "team."</a:t>
+            </a:r>
+            <a:endParaRPr lang="en-US" sz="1200" dirty="0"/>
+          </a:p>
+          <a:p>
+            <a:pPr algn="l" marL="342900" indent="-342900">
+              <a:lnSpc>
+                <a:spcPts val="1620"/>
+              </a:lnSpc>
+              <a:spcAft>
+                <a:spcPts val="300"/>
+              </a:spcAft>
+              <a:buSzPct val="100000"/>
+              <a:buChar char="•"/>
+            </a:pPr>
+            <a:r>
+              <a:rPr lang="en-US" sz="1200" dirty="0">
+                <a:solidFill>
+                  <a:srgbClr val="2C2C2C"/>
+                </a:solidFill>
+                <a:latin typeface="Verdana" pitchFamily="34" charset="0"/>
+                <a:ea typeface="Verdana" pitchFamily="34" charset="-122"/>
+                <a:cs typeface="Verdana" pitchFamily="34" charset="-120"/>
+              </a:rPr>
+              <a:t>The game IS the lesson at this band. Don't add a worksheet.</a:t>
+            </a:r>
+            <a:endParaRPr lang="en-US" sz="1200" dirty="0"/>
+          </a:p>
+          <a:p>
+            <a:pPr algn="l" marL="342900" indent="-342900">
+              <a:lnSpc>
+                <a:spcPts val="1620"/>
+              </a:lnSpc>
+              <a:spcAft>
+                <a:spcPts val="300"/>
+              </a:spcAft>
+              <a:buSzPct val="100000"/>
+              <a:buChar char="•"/>
+            </a:pPr>
+            <a:r>
+              <a:rPr lang="en-US" sz="1200" dirty="0">
+                <a:solidFill>
+                  <a:srgbClr val="2C2C2C"/>
+                </a:solidFill>
+                <a:latin typeface="Verdana" pitchFamily="34" charset="0"/>
+                <a:ea typeface="Verdana" pitchFamily="34" charset="-122"/>
+                <a:cs typeface="Verdana" pitchFamily="34" charset="-120"/>
+              </a:rPr>
+              <a:t>Note: children who completed Module 5 will be fast at twins. Push them with the "speed challenge" — name the twin in under 1 second.</a:t>
             </a:r>
             <a:endParaRPr lang="en-US" sz="1200" dirty="0"/>
           </a:p>
@@ -2322,7 +3283,7 @@
                 <a:ea typeface="Georgia" pitchFamily="34" charset="-122"/>
                 <a:cs typeface="Georgia" pitchFamily="34" charset="-120"/>
               </a:rPr>
-              <a:t>Materials</a:t>
+              <a:t>Goal</a:t>
             </a:r>
             <a:endParaRPr lang="en-US" sz="1800" dirty="0"/>
           </a:p>
@@ -2370,7 +3331,7 @@
                 <a:ea typeface="Verdana" pitchFamily="34" charset="-122"/>
                 <a:cs typeface="Verdana" pitchFamily="34" charset="-120"/>
               </a:rPr>
-              <a:t>– A deck of number cards 1–9 (4 of each = 36 cards) per pair. – Counters (optional).</a:t>
+              <a:t>Children play a card game finding the "twin" — the partner that makes 10 with each card.</a:t>
             </a:r>
             <a:endParaRPr lang="en-US" sz="1200" dirty="0"/>
           </a:p>
@@ -2528,7 +3489,7 @@
                 <a:ea typeface="Georgia" pitchFamily="34" charset="-122"/>
                 <a:cs typeface="Georgia" pitchFamily="34" charset="-120"/>
               </a:rPr>
-              <a:t>The flow</a:t>
+              <a:t>Materials</a:t>
             </a:r>
             <a:endParaRPr lang="en-US" sz="1800" dirty="0"/>
           </a:p>
@@ -2537,6 +3498,76 @@
       <p:sp>
         <p:nvSpPr>
           <p:cNvPr id="4" name="Text 2"/>
+          <p:cNvSpPr/>
+          <p:nvPr/>
+        </p:nvSpPr>
+        <p:spPr>
+          <a:xfrm>
+            <a:off x="634901" y="883593"/>
+            <a:ext cx="8102798" cy="525661"/>
+          </a:xfrm>
+          <a:prstGeom prst="rect">
+            <a:avLst/>
+          </a:prstGeom>
+          <a:noFill/>
+          <a:ln/>
+        </p:spPr>
+        <p:txBody>
+          <a:bodyPr wrap="square" lIns="0" tIns="0" rIns="0" bIns="0" rtlCol="0" anchor="t"/>
+          <a:lstStyle/>
+          <a:p>
+            <a:pPr algn="l" marL="342900" indent="-342900">
+              <a:lnSpc>
+                <a:spcPts val="1620"/>
+              </a:lnSpc>
+              <a:spcAft>
+                <a:spcPts val="300"/>
+              </a:spcAft>
+              <a:buSzPct val="100000"/>
+              <a:buChar char="•"/>
+            </a:pPr>
+            <a:r>
+              <a:rPr lang="en-US" sz="1200" dirty="0">
+                <a:solidFill>
+                  <a:srgbClr val="2C2C2C"/>
+                </a:solidFill>
+                <a:latin typeface="Verdana" pitchFamily="34" charset="0"/>
+                <a:ea typeface="Verdana" pitchFamily="34" charset="-122"/>
+                <a:cs typeface="Verdana" pitchFamily="34" charset="-120"/>
+              </a:rPr>
+              <a:t>A deck of number cards 1–9 (4 of each = 36 cards) per pair.</a:t>
+            </a:r>
+            <a:endParaRPr lang="en-US" sz="1200" dirty="0"/>
+          </a:p>
+          <a:p>
+            <a:pPr algn="l" marL="342900" indent="-342900">
+              <a:lnSpc>
+                <a:spcPts val="1620"/>
+              </a:lnSpc>
+              <a:spcAft>
+                <a:spcPts val="300"/>
+              </a:spcAft>
+              <a:buSzPct val="100000"/>
+              <a:buChar char="•"/>
+            </a:pPr>
+            <a:r>
+              <a:rPr lang="en-US" sz="1200" dirty="0">
+                <a:solidFill>
+                  <a:srgbClr val="2C2C2C"/>
+                </a:solidFill>
+                <a:latin typeface="Verdana" pitchFamily="34" charset="0"/>
+                <a:ea typeface="Verdana" pitchFamily="34" charset="-122"/>
+                <a:cs typeface="Verdana" pitchFamily="34" charset="-120"/>
+              </a:rPr>
+              <a:t>Counters (optional).</a:t>
+            </a:r>
+            <a:endParaRPr lang="en-US" sz="1200" dirty="0"/>
+          </a:p>
+        </p:txBody>
+      </p:sp>
+      <p:sp>
+        <p:nvSpPr>
+          <p:cNvPr id="5" name="Text 3"/>
           <p:cNvSpPr/>
           <p:nvPr/>
         </p:nvSpPr>
@@ -2686,7 +3717,7 @@
                 <a:ea typeface="Georgia" pitchFamily="34" charset="-122"/>
                 <a:cs typeface="Georgia" pitchFamily="34" charset="-120"/>
               </a:rPr>
-              <a:t>Settle + introduce the chant (5 min)</a:t>
+              <a:t>The flow</a:t>
             </a:r>
             <a:endParaRPr lang="en-US" sz="1800" dirty="0"/>
           </a:p>
@@ -2695,203 +3726,6 @@
       <p:sp>
         <p:nvSpPr>
           <p:cNvPr id="4" name="Text 2"/>
-          <p:cNvSpPr/>
-          <p:nvPr/>
-        </p:nvSpPr>
-        <p:spPr>
-          <a:xfrm>
-            <a:off x="406301" y="870942"/>
-            <a:ext cx="8498026" cy="213271"/>
-          </a:xfrm>
-          <a:prstGeom prst="rect">
-            <a:avLst/>
-          </a:prstGeom>
-          <a:noFill/>
-          <a:ln/>
-        </p:spPr>
-        <p:txBody>
-          <a:bodyPr wrap="square" lIns="0" tIns="0" rIns="0" bIns="0" rtlCol="0" anchor="t"/>
-          <a:lstStyle/>
-          <a:p>
-            <a:pPr algn="l" indent="0" marL="0">
-              <a:lnSpc>
-                <a:spcPts val="1680"/>
-              </a:lnSpc>
-              <a:spcBef>
-                <a:spcPts val="300"/>
-              </a:spcBef>
-              <a:spcAft>
-                <a:spcPts val="300"/>
-              </a:spcAft>
-              <a:buNone/>
-            </a:pPr>
-            <a:r>
-              <a:rPr lang="en-US" sz="1200" dirty="0">
-                <a:solidFill>
-                  <a:srgbClr val="2C2C2C"/>
-                </a:solidFill>
-                <a:latin typeface="Verdana" pitchFamily="34" charset="0"/>
-                <a:ea typeface="Verdana" pitchFamily="34" charset="-122"/>
-                <a:cs typeface="Verdana" pitchFamily="34" charset="-120"/>
-              </a:rPr>
-              <a:t>Teach the chant — clap on each pair:</a:t>
-            </a:r>
-            <a:endParaRPr lang="en-US" sz="1200" dirty="0"/>
-          </a:p>
-        </p:txBody>
-      </p:sp>
-      <p:sp>
-        <p:nvSpPr>
-          <p:cNvPr id="5" name="Text 3"/>
-          <p:cNvSpPr/>
-          <p:nvPr/>
-        </p:nvSpPr>
-        <p:spPr>
-          <a:xfrm>
-            <a:off x="406301" y="1173063"/>
-            <a:ext cx="8331398" cy="611981"/>
-          </a:xfrm>
-          <a:prstGeom prst="rect">
-            <a:avLst/>
-          </a:prstGeom>
-          <a:solidFill>
-            <a:srgbClr val="FFFFFF"/>
-          </a:solidFill>
-          <a:ln/>
-        </p:spPr>
-        <p:txBody>
-          <a:bodyPr wrap="square" rtlCol="0" anchor="ctr"/>
-          <a:lstStyle/>
-          <a:p>
-            <a:pPr indent="0" marL="0">
-              <a:buNone/>
-            </a:pPr>
-            <a:endParaRPr lang="en-US" dirty="0"/>
-          </a:p>
-        </p:txBody>
-      </p:sp>
-      <p:sp>
-        <p:nvSpPr>
-          <p:cNvPr id="6" name="Shape 4"/>
-          <p:cNvSpPr/>
-          <p:nvPr/>
-        </p:nvSpPr>
-        <p:spPr>
-          <a:xfrm>
-            <a:off x="434876" y="1173063"/>
-            <a:ext cx="0" cy="611981"/>
-          </a:xfrm>
-          <a:prstGeom prst="line">
-            <a:avLst/>
-          </a:prstGeom>
-          <a:noFill/>
-          <a:ln w="57150">
-            <a:solidFill>
-              <a:srgbClr val="E07A5F"/>
-            </a:solidFill>
-            <a:prstDash val="solid"/>
-          </a:ln>
-        </p:spPr>
-      </p:sp>
-      <p:sp>
-        <p:nvSpPr>
-          <p:cNvPr id="7" name="Text 5"/>
-          <p:cNvSpPr/>
-          <p:nvPr/>
-        </p:nvSpPr>
-        <p:spPr>
-          <a:xfrm>
-            <a:off x="692051" y="1363563"/>
-            <a:ext cx="7973389" cy="230981"/>
-          </a:xfrm>
-          <a:prstGeom prst="rect">
-            <a:avLst/>
-          </a:prstGeom>
-          <a:noFill/>
-          <a:ln/>
-        </p:spPr>
-        <p:txBody>
-          <a:bodyPr wrap="square" lIns="0" tIns="0" rIns="0" bIns="0" rtlCol="0" anchor="t"/>
-          <a:lstStyle/>
-          <a:p>
-            <a:pPr algn="l" indent="0" marL="0">
-              <a:lnSpc>
-                <a:spcPts val="1820"/>
-              </a:lnSpc>
-              <a:spcBef>
-                <a:spcPts val="300"/>
-              </a:spcBef>
-              <a:spcAft>
-                <a:spcPts val="300"/>
-              </a:spcAft>
-              <a:buNone/>
-            </a:pPr>
-            <a:r>
-              <a:rPr lang="en-US" sz="1300" i="1" dirty="0">
-                <a:solidFill>
-                  <a:srgbClr val="2C2C2C"/>
-                </a:solidFill>
-                <a:latin typeface="Georgia" pitchFamily="34" charset="0"/>
-                <a:ea typeface="Georgia" pitchFamily="34" charset="-122"/>
-                <a:cs typeface="Georgia" pitchFamily="34" charset="-120"/>
-              </a:rPr>
-              <a:t>"1 and 9 make 10! 2 and 8 make 10! 3 and 7 make 10! 4 and 6 make 10! 5 and 5 make 10!"</a:t>
-            </a:r>
-            <a:endParaRPr lang="en-US" sz="1300" dirty="0"/>
-          </a:p>
-        </p:txBody>
-      </p:sp>
-      <p:sp>
-        <p:nvSpPr>
-          <p:cNvPr id="8" name="Text 6"/>
-          <p:cNvSpPr/>
-          <p:nvPr/>
-        </p:nvSpPr>
-        <p:spPr>
-          <a:xfrm>
-            <a:off x="406301" y="1873895"/>
-            <a:ext cx="8498026" cy="213271"/>
-          </a:xfrm>
-          <a:prstGeom prst="rect">
-            <a:avLst/>
-          </a:prstGeom>
-          <a:noFill/>
-          <a:ln/>
-        </p:spPr>
-        <p:txBody>
-          <a:bodyPr wrap="square" lIns="0" tIns="0" rIns="0" bIns="0" rtlCol="0" anchor="t"/>
-          <a:lstStyle/>
-          <a:p>
-            <a:pPr algn="l" indent="0" marL="0">
-              <a:lnSpc>
-                <a:spcPts val="1680"/>
-              </a:lnSpc>
-              <a:spcBef>
-                <a:spcPts val="300"/>
-              </a:spcBef>
-              <a:spcAft>
-                <a:spcPts val="300"/>
-              </a:spcAft>
-              <a:buNone/>
-            </a:pPr>
-            <a:r>
-              <a:rPr lang="en-US" sz="1200" dirty="0">
-                <a:solidFill>
-                  <a:srgbClr val="2C2C2C"/>
-                </a:solidFill>
-                <a:latin typeface="Verdana" pitchFamily="34" charset="0"/>
-                <a:ea typeface="Verdana" pitchFamily="34" charset="-122"/>
-                <a:cs typeface="Verdana" pitchFamily="34" charset="-120"/>
-              </a:rPr>
-              <a:t>Say it 3 times. (Children from Module 5 will know this — re-use it.)</a:t>
-            </a:r>
-            <a:endParaRPr lang="en-US" sz="1200" dirty="0"/>
-          </a:p>
-        </p:txBody>
-      </p:sp>
-      <p:sp>
-        <p:nvSpPr>
-          <p:cNvPr id="9" name="Text 7"/>
           <p:cNvSpPr/>
           <p:nvPr/>
         </p:nvSpPr>
@@ -3041,7 +3875,7 @@
                 <a:ea typeface="Georgia" pitchFamily="34" charset="-122"/>
                 <a:cs typeface="Georgia" pitchFamily="34" charset="-120"/>
               </a:rPr>
-              <a:t>Story (5 min)</a:t>
+              <a:t>Settle + introduce the chant (5 min)</a:t>
             </a:r>
             <a:endParaRPr lang="en-US" sz="1800" dirty="0"/>
           </a:p>
@@ -3056,7 +3890,7 @@
         <p:spPr>
           <a:xfrm>
             <a:off x="406301" y="870942"/>
-            <a:ext cx="8498026" cy="426541"/>
+            <a:ext cx="8498026" cy="213271"/>
           </a:xfrm>
           <a:prstGeom prst="rect">
             <a:avLst/>
@@ -3081,7 +3915,7 @@
               <a:buNone/>
             </a:pPr>
             <a:r>
-              <a:rPr lang="en-US" sz="1200" i="1" dirty="0">
+              <a:rPr lang="en-US" sz="1200" dirty="0">
                 <a:solidFill>
                   <a:srgbClr val="2C2C2C"/>
                 </a:solidFill>
@@ -3089,7 +3923,7 @@
                 <a:ea typeface="Verdana" pitchFamily="34" charset="-122"/>
                 <a:cs typeface="Verdana" pitchFamily="34" charset="-120"/>
               </a:rPr>
-              <a:t>"Today we play a game called Make the Twin. Every number from 1 to 9 has a twin that makes 10 with it. 1's twin is 9. 2's twin is 8. Today we find them."</a:t>
+              <a:t>Teach the chant — clap on each pair:</a:t>
             </a:r>
             <a:endParaRPr lang="en-US" sz="1200" dirty="0"/>
           </a:p>
@@ -3098,6 +3932,155 @@
       <p:sp>
         <p:nvSpPr>
           <p:cNvPr id="5" name="Text 3"/>
+          <p:cNvSpPr/>
+          <p:nvPr/>
+        </p:nvSpPr>
+        <p:spPr>
+          <a:xfrm>
+            <a:off x="406301" y="1173063"/>
+            <a:ext cx="8331398" cy="611981"/>
+          </a:xfrm>
+          <a:prstGeom prst="rect">
+            <a:avLst/>
+          </a:prstGeom>
+          <a:solidFill>
+            <a:srgbClr val="FFFFFF"/>
+          </a:solidFill>
+          <a:ln/>
+        </p:spPr>
+        <p:txBody>
+          <a:bodyPr wrap="square" rtlCol="0" anchor="ctr"/>
+          <a:lstStyle/>
+          <a:p>
+            <a:pPr indent="0" marL="0">
+              <a:buNone/>
+            </a:pPr>
+            <a:endParaRPr lang="en-US" dirty="0"/>
+          </a:p>
+        </p:txBody>
+      </p:sp>
+      <p:sp>
+        <p:nvSpPr>
+          <p:cNvPr id="6" name="Shape 4"/>
+          <p:cNvSpPr/>
+          <p:nvPr/>
+        </p:nvSpPr>
+        <p:spPr>
+          <a:xfrm>
+            <a:off x="434876" y="1173063"/>
+            <a:ext cx="0" cy="611981"/>
+          </a:xfrm>
+          <a:prstGeom prst="line">
+            <a:avLst/>
+          </a:prstGeom>
+          <a:noFill/>
+          <a:ln w="57150">
+            <a:solidFill>
+              <a:srgbClr val="E07A5F"/>
+            </a:solidFill>
+            <a:prstDash val="solid"/>
+          </a:ln>
+        </p:spPr>
+      </p:sp>
+      <p:sp>
+        <p:nvSpPr>
+          <p:cNvPr id="7" name="Text 5"/>
+          <p:cNvSpPr/>
+          <p:nvPr/>
+        </p:nvSpPr>
+        <p:spPr>
+          <a:xfrm>
+            <a:off x="692051" y="1363563"/>
+            <a:ext cx="7973389" cy="230981"/>
+          </a:xfrm>
+          <a:prstGeom prst="rect">
+            <a:avLst/>
+          </a:prstGeom>
+          <a:noFill/>
+          <a:ln/>
+        </p:spPr>
+        <p:txBody>
+          <a:bodyPr wrap="square" lIns="0" tIns="0" rIns="0" bIns="0" rtlCol="0" anchor="t"/>
+          <a:lstStyle/>
+          <a:p>
+            <a:pPr algn="l" indent="0" marL="0">
+              <a:lnSpc>
+                <a:spcPts val="1820"/>
+              </a:lnSpc>
+              <a:spcBef>
+                <a:spcPts val="300"/>
+              </a:spcBef>
+              <a:spcAft>
+                <a:spcPts val="300"/>
+              </a:spcAft>
+              <a:buNone/>
+            </a:pPr>
+            <a:r>
+              <a:rPr lang="en-US" sz="1300" i="1" dirty="0">
+                <a:solidFill>
+                  <a:srgbClr val="2C2C2C"/>
+                </a:solidFill>
+                <a:latin typeface="Georgia" pitchFamily="34" charset="0"/>
+                <a:ea typeface="Georgia" pitchFamily="34" charset="-122"/>
+                <a:cs typeface="Georgia" pitchFamily="34" charset="-120"/>
+              </a:rPr>
+              <a:t>"1 and 9 make 10! 2 and 8 make 10! 3 and 7 make 10! 4 and 6 make 10! 5 and 5 make 10!"</a:t>
+            </a:r>
+            <a:endParaRPr lang="en-US" sz="1300" dirty="0"/>
+          </a:p>
+        </p:txBody>
+      </p:sp>
+      <p:sp>
+        <p:nvSpPr>
+          <p:cNvPr id="8" name="Text 6"/>
+          <p:cNvSpPr/>
+          <p:nvPr/>
+        </p:nvSpPr>
+        <p:spPr>
+          <a:xfrm>
+            <a:off x="406301" y="1873895"/>
+            <a:ext cx="8498026" cy="213271"/>
+          </a:xfrm>
+          <a:prstGeom prst="rect">
+            <a:avLst/>
+          </a:prstGeom>
+          <a:noFill/>
+          <a:ln/>
+        </p:spPr>
+        <p:txBody>
+          <a:bodyPr wrap="square" lIns="0" tIns="0" rIns="0" bIns="0" rtlCol="0" anchor="t"/>
+          <a:lstStyle/>
+          <a:p>
+            <a:pPr algn="l" indent="0" marL="0">
+              <a:lnSpc>
+                <a:spcPts val="1680"/>
+              </a:lnSpc>
+              <a:spcBef>
+                <a:spcPts val="300"/>
+              </a:spcBef>
+              <a:spcAft>
+                <a:spcPts val="300"/>
+              </a:spcAft>
+              <a:buNone/>
+            </a:pPr>
+            <a:r>
+              <a:rPr lang="en-US" sz="1200" dirty="0">
+                <a:solidFill>
+                  <a:srgbClr val="2C2C2C"/>
+                </a:solidFill>
+                <a:latin typeface="Verdana" pitchFamily="34" charset="0"/>
+                <a:ea typeface="Verdana" pitchFamily="34" charset="-122"/>
+                <a:cs typeface="Verdana" pitchFamily="34" charset="-120"/>
+              </a:rPr>
+              <a:t>Say it 3 times. (Children from Module 5 will know this — re-use it.)</a:t>
+            </a:r>
+            <a:endParaRPr lang="en-US" sz="1200" dirty="0"/>
+          </a:p>
+        </p:txBody>
+      </p:sp>
+      <p:sp>
+        <p:nvSpPr>
+          <p:cNvPr id="9" name="Text 7"/>
           <p:cNvSpPr/>
           <p:nvPr/>
         </p:nvSpPr>
@@ -3247,7 +4230,7 @@
                 <a:ea typeface="Georgia" pitchFamily="34" charset="-122"/>
                 <a:cs typeface="Georgia" pitchFamily="34" charset="-120"/>
               </a:rPr>
-              <a:t>Game (17 min)</a:t>
+              <a:t>Story (5 min)</a:t>
             </a:r>
             <a:endParaRPr lang="en-US" sz="1800" dirty="0"/>
           </a:p>
@@ -3262,7 +4245,7 @@
         <p:spPr>
           <a:xfrm>
             <a:off x="406301" y="870942"/>
-            <a:ext cx="8498026" cy="213271"/>
+            <a:ext cx="8498026" cy="426541"/>
           </a:xfrm>
           <a:prstGeom prst="rect">
             <a:avLst/>
@@ -3287,7 +4270,7 @@
               <a:buNone/>
             </a:pPr>
             <a:r>
-              <a:rPr lang="en-US" sz="1200" b="1" dirty="0">
+              <a:rPr lang="en-US" sz="1200" i="1" dirty="0">
                 <a:solidFill>
                   <a:srgbClr val="2C2C2C"/>
                 </a:solidFill>
@@ -3295,7 +4278,7 @@
                 <a:ea typeface="Verdana" pitchFamily="34" charset="-122"/>
                 <a:cs typeface="Verdana" pitchFamily="34" charset="-120"/>
               </a:rPr>
-              <a:t>How to play:</a:t>
+              <a:t>"Today we play a game called Make the Twin. Every number from 1 to 9 has a twin that makes 10 with it. 1's twin is 9. 2's twin is 8. Today we find them."</a:t>
             </a:r>
             <a:endParaRPr lang="en-US" sz="1200" dirty="0"/>
           </a:p>
@@ -3304,242 +4287,6 @@
       <p:sp>
         <p:nvSpPr>
           <p:cNvPr id="5" name="Text 3"/>
-          <p:cNvSpPr/>
-          <p:nvPr/>
-        </p:nvSpPr>
-        <p:spPr>
-          <a:xfrm>
-            <a:off x="634901" y="1173063"/>
-            <a:ext cx="8102798" cy="525661"/>
-          </a:xfrm>
-          <a:prstGeom prst="rect">
-            <a:avLst/>
-          </a:prstGeom>
-          <a:noFill/>
-          <a:ln/>
-        </p:spPr>
-        <p:txBody>
-          <a:bodyPr wrap="square" lIns="0" tIns="0" rIns="0" bIns="0" rtlCol="0" anchor="t"/>
-          <a:lstStyle/>
-          <a:p>
-            <a:pPr algn="l" marL="342900" indent="-342900">
-              <a:lnSpc>
-                <a:spcPts val="1620"/>
-              </a:lnSpc>
-              <a:spcAft>
-                <a:spcPts val="300"/>
-              </a:spcAft>
-              <a:buSzPct val="100000"/>
-              <a:buChar char="•"/>
-            </a:pPr>
-            <a:r>
-              <a:rPr lang="en-US" sz="1200" dirty="0">
-                <a:solidFill>
-                  <a:srgbClr val="2C2C2C"/>
-                </a:solidFill>
-                <a:latin typeface="Verdana" pitchFamily="34" charset="0"/>
-                <a:ea typeface="Verdana" pitchFamily="34" charset="-122"/>
-                <a:cs typeface="Verdana" pitchFamily="34" charset="-120"/>
-              </a:rPr>
-              <a:t>Shuffle the deck. Deal 5 cards to each player. Place 5 cards face-up in the middle.</a:t>
-            </a:r>
-            <a:endParaRPr lang="en-US" sz="1200" dirty="0"/>
-          </a:p>
-          <a:p>
-            <a:pPr algn="l" marL="342900" indent="-342900">
-              <a:lnSpc>
-                <a:spcPts val="1620"/>
-              </a:lnSpc>
-              <a:spcAft>
-                <a:spcPts val="300"/>
-              </a:spcAft>
-              <a:buSzPct val="100000"/>
-              <a:buChar char="•"/>
-            </a:pPr>
-            <a:r>
-              <a:rPr lang="en-US" sz="1200" dirty="0">
-                <a:solidFill>
-                  <a:srgbClr val="2C2C2C"/>
-                </a:solidFill>
-                <a:latin typeface="Verdana" pitchFamily="34" charset="0"/>
-                <a:ea typeface="Verdana" pitchFamily="34" charset="-122"/>
-                <a:cs typeface="Verdana" pitchFamily="34" charset="-120"/>
-              </a:rPr>
-              <a:t>On your turn:</a:t>
-            </a:r>
-            <a:endParaRPr lang="en-US" sz="1200" dirty="0"/>
-          </a:p>
-        </p:txBody>
-      </p:sp>
-      <p:sp>
-        <p:nvSpPr>
-          <p:cNvPr id="6" name="Text 4"/>
-          <p:cNvSpPr/>
-          <p:nvPr/>
-        </p:nvSpPr>
-        <p:spPr>
-          <a:xfrm>
-            <a:off x="406301" y="1787575"/>
-            <a:ext cx="8498026" cy="426541"/>
-          </a:xfrm>
-          <a:prstGeom prst="rect">
-            <a:avLst/>
-          </a:prstGeom>
-          <a:noFill/>
-          <a:ln/>
-        </p:spPr>
-        <p:txBody>
-          <a:bodyPr wrap="square" lIns="0" tIns="0" rIns="0" bIns="0" rtlCol="0" anchor="t"/>
-          <a:lstStyle/>
-          <a:p>
-            <a:pPr algn="l" indent="0" marL="0">
-              <a:lnSpc>
-                <a:spcPts val="1680"/>
-              </a:lnSpc>
-              <a:spcBef>
-                <a:spcPts val="300"/>
-              </a:spcBef>
-              <a:spcAft>
-                <a:spcPts val="300"/>
-              </a:spcAft>
-              <a:buNone/>
-            </a:pPr>
-            <a:r>
-              <a:rPr lang="en-US" sz="1200" dirty="0">
-                <a:solidFill>
-                  <a:srgbClr val="2C2C2C"/>
-                </a:solidFill>
-                <a:latin typeface="Verdana" pitchFamily="34" charset="0"/>
-                <a:ea typeface="Verdana" pitchFamily="34" charset="-122"/>
-                <a:cs typeface="Verdana" pitchFamily="34" charset="-120"/>
-              </a:rPr>
-              <a:t>– Look at your hand and the middle.    – Find a "twin pair" — your card + a middle card that add to 10.    – Take both. Put them in your "pile."    – Draw a new card from the deck.</a:t>
-            </a:r>
-            <a:endParaRPr lang="en-US" sz="1200" dirty="0"/>
-          </a:p>
-        </p:txBody>
-      </p:sp>
-      <p:sp>
-        <p:nvSpPr>
-          <p:cNvPr id="7" name="Text 5"/>
-          <p:cNvSpPr/>
-          <p:nvPr/>
-        </p:nvSpPr>
-        <p:spPr>
-          <a:xfrm>
-            <a:off x="634901" y="2302966"/>
-            <a:ext cx="8102798" cy="525661"/>
-          </a:xfrm>
-          <a:prstGeom prst="rect">
-            <a:avLst/>
-          </a:prstGeom>
-          <a:noFill/>
-          <a:ln/>
-        </p:spPr>
-        <p:txBody>
-          <a:bodyPr wrap="square" lIns="0" tIns="0" rIns="0" bIns="0" rtlCol="0" anchor="t"/>
-          <a:lstStyle/>
-          <a:p>
-            <a:pPr algn="l" marL="342900" indent="-342900">
-              <a:lnSpc>
-                <a:spcPts val="1620"/>
-              </a:lnSpc>
-              <a:spcAft>
-                <a:spcPts val="300"/>
-              </a:spcAft>
-              <a:buSzPct val="100000"/>
-              <a:buChar char="•"/>
-            </a:pPr>
-            <a:r>
-              <a:rPr lang="en-US" sz="1200" dirty="0">
-                <a:solidFill>
-                  <a:srgbClr val="2C2C2C"/>
-                </a:solidFill>
-                <a:latin typeface="Verdana" pitchFamily="34" charset="0"/>
-                <a:ea typeface="Verdana" pitchFamily="34" charset="-122"/>
-                <a:cs typeface="Verdana" pitchFamily="34" charset="-120"/>
-              </a:rPr>
-              <a:t>If you can't find a twin, place 1 card in the middle. End your turn.</a:t>
-            </a:r>
-            <a:endParaRPr lang="en-US" sz="1200" dirty="0"/>
-          </a:p>
-          <a:p>
-            <a:pPr algn="l" marL="342900" indent="-342900">
-              <a:lnSpc>
-                <a:spcPts val="1620"/>
-              </a:lnSpc>
-              <a:spcAft>
-                <a:spcPts val="300"/>
-              </a:spcAft>
-              <a:buSzPct val="100000"/>
-              <a:buChar char="•"/>
-            </a:pPr>
-            <a:r>
-              <a:rPr lang="en-US" sz="1200" dirty="0">
-                <a:solidFill>
-                  <a:srgbClr val="2C2C2C"/>
-                </a:solidFill>
-                <a:latin typeface="Verdana" pitchFamily="34" charset="0"/>
-                <a:ea typeface="Verdana" pitchFamily="34" charset="-122"/>
-                <a:cs typeface="Verdana" pitchFamily="34" charset="-120"/>
-              </a:rPr>
-              <a:t>When the deck is empty, count pairs. Most pairs wins!</a:t>
-            </a:r>
-            <a:endParaRPr lang="en-US" sz="1200" dirty="0"/>
-          </a:p>
-        </p:txBody>
-      </p:sp>
-      <p:sp>
-        <p:nvSpPr>
-          <p:cNvPr id="8" name="Text 6"/>
-          <p:cNvSpPr/>
-          <p:nvPr/>
-        </p:nvSpPr>
-        <p:spPr>
-          <a:xfrm>
-            <a:off x="406301" y="2917478"/>
-            <a:ext cx="8498026" cy="213271"/>
-          </a:xfrm>
-          <a:prstGeom prst="rect">
-            <a:avLst/>
-          </a:prstGeom>
-          <a:noFill/>
-          <a:ln/>
-        </p:spPr>
-        <p:txBody>
-          <a:bodyPr wrap="square" lIns="0" tIns="0" rIns="0" bIns="0" rtlCol="0" anchor="t"/>
-          <a:lstStyle/>
-          <a:p>
-            <a:pPr algn="l" indent="0" marL="0">
-              <a:lnSpc>
-                <a:spcPts val="1680"/>
-              </a:lnSpc>
-              <a:spcBef>
-                <a:spcPts val="300"/>
-              </a:spcBef>
-              <a:spcAft>
-                <a:spcPts val="300"/>
-              </a:spcAft>
-              <a:buNone/>
-            </a:pPr>
-            <a:r>
-              <a:rPr lang="en-US" sz="1200" dirty="0">
-                <a:solidFill>
-                  <a:srgbClr val="2C2C2C"/>
-                </a:solidFill>
-                <a:latin typeface="Verdana" pitchFamily="34" charset="0"/>
-                <a:ea typeface="Verdana" pitchFamily="34" charset="-122"/>
-                <a:cs typeface="Verdana" pitchFamily="34" charset="-120"/>
-              </a:rPr>
-              <a:t>Play 2 rounds.</a:t>
-            </a:r>
-            <a:endParaRPr lang="en-US" sz="1200" dirty="0"/>
-          </a:p>
-        </p:txBody>
-      </p:sp>
-      <p:sp>
-        <p:nvSpPr>
-          <p:cNvPr id="9" name="Text 7"/>
           <p:cNvSpPr/>
           <p:nvPr/>
         </p:nvSpPr>
@@ -3689,7 +4436,7 @@
                 <a:ea typeface="Georgia" pitchFamily="34" charset="-122"/>
                 <a:cs typeface="Georgia" pitchFamily="34" charset="-120"/>
               </a:rPr>
-              <a:t>Show + chant (3 min)</a:t>
+              <a:t>Game (17 min)</a:t>
             </a:r>
             <a:endParaRPr lang="en-US" sz="1800" dirty="0"/>
           </a:p>
@@ -3703,8 +4450,8 @@
         </p:nvSpPr>
         <p:spPr>
           <a:xfrm>
-            <a:off x="634901" y="883593"/>
-            <a:ext cx="8102798" cy="281880"/>
+            <a:off x="406301" y="870942"/>
+            <a:ext cx="8498026" cy="213271"/>
           </a:xfrm>
           <a:prstGeom prst="rect">
             <a:avLst/>
@@ -3716,18 +4463,20 @@
           <a:bodyPr wrap="square" lIns="0" tIns="0" rIns="0" bIns="0" rtlCol="0" anchor="t"/>
           <a:lstStyle/>
           <a:p>
-            <a:pPr algn="l" marL="342900" indent="-342900">
-              <a:lnSpc>
-                <a:spcPts val="1620"/>
-              </a:lnSpc>
-              <a:spcAft>
-                <a:spcPts val="300"/>
-              </a:spcAft>
-              <a:buSzPct val="100000"/>
-              <a:buChar char="•"/>
-            </a:pPr>
-            <a:r>
-              <a:rPr lang="en-US" sz="1200" dirty="0">
+            <a:pPr algn="l" indent="0" marL="0">
+              <a:lnSpc>
+                <a:spcPts val="1680"/>
+              </a:lnSpc>
+              <a:spcBef>
+                <a:spcPts val="300"/>
+              </a:spcBef>
+              <a:spcAft>
+                <a:spcPts val="300"/>
+              </a:spcAft>
+              <a:buNone/>
+            </a:pPr>
+            <a:r>
+              <a:rPr lang="en-US" sz="1200" b="1" dirty="0">
                 <a:solidFill>
                   <a:srgbClr val="2C2C2C"/>
                 </a:solidFill>
@@ -3735,7 +4484,7 @@
                 <a:ea typeface="Verdana" pitchFamily="34" charset="-122"/>
                 <a:cs typeface="Verdana" pitchFamily="34" charset="-120"/>
               </a:rPr>
-              <a:t>"Who won a round?" — winner shares ONE twin pair they made.</a:t>
+              <a:t>How to play:</a:t>
             </a:r>
             <a:endParaRPr lang="en-US" sz="1200" dirty="0"/>
           </a:p>
@@ -3744,100 +4493,6 @@
       <p:sp>
         <p:nvSpPr>
           <p:cNvPr id="5" name="Text 3"/>
-          <p:cNvSpPr/>
-          <p:nvPr/>
-        </p:nvSpPr>
-        <p:spPr>
-          <a:xfrm>
-            <a:off x="406301" y="1254323"/>
-            <a:ext cx="8498026" cy="213271"/>
-          </a:xfrm>
-          <a:prstGeom prst="rect">
-            <a:avLst/>
-          </a:prstGeom>
-          <a:noFill/>
-          <a:ln/>
-        </p:spPr>
-        <p:txBody>
-          <a:bodyPr wrap="square" lIns="0" tIns="0" rIns="0" bIns="0" rtlCol="0" anchor="t"/>
-          <a:lstStyle/>
-          <a:p>
-            <a:pPr algn="l" indent="0" marL="0">
-              <a:lnSpc>
-                <a:spcPts val="1680"/>
-              </a:lnSpc>
-              <a:spcBef>
-                <a:spcPts val="300"/>
-              </a:spcBef>
-              <a:spcAft>
-                <a:spcPts val="300"/>
-              </a:spcAft>
-              <a:buNone/>
-            </a:pPr>
-            <a:r>
-              <a:rPr lang="en-US" sz="1200" dirty="0">
-                <a:solidFill>
-                  <a:srgbClr val="2C2C2C"/>
-                </a:solidFill>
-                <a:latin typeface="Verdana" pitchFamily="34" charset="0"/>
-                <a:ea typeface="Verdana" pitchFamily="34" charset="-122"/>
-                <a:cs typeface="Verdana" pitchFamily="34" charset="-120"/>
-              </a:rPr>
-              <a:t>– Class chants the pair: </a:t>
-            </a:r>
-            <a:pPr algn="l" indent="0" marL="0">
-              <a:lnSpc>
-                <a:spcPts val="1680"/>
-              </a:lnSpc>
-              <a:spcBef>
-                <a:spcPts val="300"/>
-              </a:spcBef>
-              <a:spcAft>
-                <a:spcPts val="300"/>
-              </a:spcAft>
-              <a:buNone/>
-            </a:pPr>
-            <a:r>
-              <a:rPr lang="en-US" sz="1200" i="1" dirty="0">
-                <a:solidFill>
-                  <a:srgbClr val="2C2C2C"/>
-                </a:solidFill>
-                <a:latin typeface="Verdana" pitchFamily="34" charset="0"/>
-                <a:ea typeface="Verdana" pitchFamily="34" charset="-122"/>
-                <a:cs typeface="Verdana" pitchFamily="34" charset="-120"/>
-              </a:rPr>
-              <a:t>"6 and 4 make 10!"</a:t>
-            </a:r>
-            <a:pPr algn="l" indent="0" marL="0">
-              <a:lnSpc>
-                <a:spcPts val="1680"/>
-              </a:lnSpc>
-              <a:spcBef>
-                <a:spcPts val="300"/>
-              </a:spcBef>
-              <a:spcAft>
-                <a:spcPts val="300"/>
-              </a:spcAft>
-              <a:buNone/>
-            </a:pPr>
-            <a:r>
-              <a:rPr lang="en-US" sz="1200" dirty="0">
-                <a:solidFill>
-                  <a:srgbClr val="2C2C2C"/>
-                </a:solidFill>
-                <a:latin typeface="Verdana" pitchFamily="34" charset="0"/>
-                <a:ea typeface="Verdana" pitchFamily="34" charset="-122"/>
-                <a:cs typeface="Verdana" pitchFamily="34" charset="-120"/>
-              </a:rPr>
-              <a:t> – Close with the daily chant.</a:t>
-            </a:r>
-            <a:endParaRPr lang="en-US" sz="1200" dirty="0"/>
-          </a:p>
-        </p:txBody>
-      </p:sp>
-      <p:sp>
-        <p:nvSpPr>
-          <p:cNvPr id="6" name="Text 4"/>
           <p:cNvSpPr/>
           <p:nvPr/>
         </p:nvSpPr>
@@ -3987,7 +4642,7 @@
                 <a:ea typeface="Georgia" pitchFamily="34" charset="-122"/>
                 <a:cs typeface="Georgia" pitchFamily="34" charset="-120"/>
               </a:rPr>
-              <a:t>Homework</a:t>
+              <a:t>Game (17 min) (cont.)</a:t>
             </a:r>
             <a:endParaRPr lang="en-US" sz="1800" dirty="0"/>
           </a:p>
@@ -4001,8 +4656,8 @@
         </p:nvSpPr>
         <p:spPr>
           <a:xfrm>
-            <a:off x="406301" y="870942"/>
-            <a:ext cx="8498026" cy="426541"/>
+            <a:off x="634901" y="883593"/>
+            <a:ext cx="8102798" cy="525661"/>
           </a:xfrm>
           <a:prstGeom prst="rect">
             <a:avLst/>
@@ -4014,17 +4669,15 @@
           <a:bodyPr wrap="square" lIns="0" tIns="0" rIns="0" bIns="0" rtlCol="0" anchor="t"/>
           <a:lstStyle/>
           <a:p>
-            <a:pPr algn="l" indent="0" marL="0">
-              <a:lnSpc>
-                <a:spcPts val="1680"/>
-              </a:lnSpc>
-              <a:spcBef>
-                <a:spcPts val="300"/>
-              </a:spcBef>
-              <a:spcAft>
-                <a:spcPts val="300"/>
-              </a:spcAft>
-              <a:buNone/>
+            <a:pPr algn="l" marL="342900" indent="-342900">
+              <a:lnSpc>
+                <a:spcPts val="1620"/>
+              </a:lnSpc>
+              <a:spcAft>
+                <a:spcPts val="300"/>
+              </a:spcAft>
+              <a:buSzPct val="100000"/>
+              <a:buChar char="•"/>
             </a:pPr>
             <a:r>
               <a:rPr lang="en-US" sz="1200" dirty="0">
@@ -4035,15 +4688,227 @@
                 <a:ea typeface="Verdana" pitchFamily="34" charset="-122"/>
                 <a:cs typeface="Verdana" pitchFamily="34" charset="-120"/>
               </a:rPr>
-              <a:t>– At home, practise the chant with a family member. Win a round of Make the Twin if you can find a partner!</a:t>
+              <a:t>Shuffle the deck. Deal 5 cards to each player. Place 5 cards face-up in the middle.</a:t>
             </a:r>
             <a:endParaRPr lang="en-US" sz="1200" dirty="0"/>
           </a:p>
+          <a:p>
+            <a:pPr algn="l" marL="342900" indent="-342900">
+              <a:lnSpc>
+                <a:spcPts val="1620"/>
+              </a:lnSpc>
+              <a:spcAft>
+                <a:spcPts val="300"/>
+              </a:spcAft>
+              <a:buSzPct val="100000"/>
+              <a:buChar char="•"/>
+            </a:pPr>
+            <a:r>
+              <a:rPr lang="en-US" sz="1200" dirty="0">
+                <a:solidFill>
+                  <a:srgbClr val="2C2C2C"/>
+                </a:solidFill>
+                <a:latin typeface="Verdana" pitchFamily="34" charset="0"/>
+                <a:ea typeface="Verdana" pitchFamily="34" charset="-122"/>
+                <a:cs typeface="Verdana" pitchFamily="34" charset="-120"/>
+              </a:rPr>
+              <a:t>On your turn:</a:t>
+            </a:r>
+            <a:endParaRPr lang="en-US" sz="1200" dirty="0"/>
+          </a:p>
         </p:txBody>
       </p:sp>
       <p:sp>
         <p:nvSpPr>
           <p:cNvPr id="5" name="Text 3"/>
+          <p:cNvSpPr/>
+          <p:nvPr/>
+        </p:nvSpPr>
+        <p:spPr>
+          <a:xfrm>
+            <a:off x="634901" y="1510754"/>
+            <a:ext cx="8102798" cy="1013222"/>
+          </a:xfrm>
+          <a:prstGeom prst="rect">
+            <a:avLst/>
+          </a:prstGeom>
+          <a:noFill/>
+          <a:ln/>
+        </p:spPr>
+        <p:txBody>
+          <a:bodyPr wrap="square" lIns="0" tIns="0" rIns="0" bIns="0" rtlCol="0" anchor="t"/>
+          <a:lstStyle/>
+          <a:p>
+            <a:pPr algn="l" marL="342900" indent="-342900">
+              <a:lnSpc>
+                <a:spcPts val="1620"/>
+              </a:lnSpc>
+              <a:spcAft>
+                <a:spcPts val="300"/>
+              </a:spcAft>
+              <a:buSzPct val="100000"/>
+              <a:buChar char="•"/>
+            </a:pPr>
+            <a:r>
+              <a:rPr lang="en-US" sz="1200" dirty="0">
+                <a:solidFill>
+                  <a:srgbClr val="2C2C2C"/>
+                </a:solidFill>
+                <a:latin typeface="Verdana" pitchFamily="34" charset="0"/>
+                <a:ea typeface="Verdana" pitchFamily="34" charset="-122"/>
+                <a:cs typeface="Verdana" pitchFamily="34" charset="-120"/>
+              </a:rPr>
+              <a:t>Look at your hand and the middle.</a:t>
+            </a:r>
+            <a:endParaRPr lang="en-US" sz="1200" dirty="0"/>
+          </a:p>
+          <a:p>
+            <a:pPr algn="l" marL="342900" indent="-342900">
+              <a:lnSpc>
+                <a:spcPts val="1620"/>
+              </a:lnSpc>
+              <a:spcAft>
+                <a:spcPts val="300"/>
+              </a:spcAft>
+              <a:buSzPct val="100000"/>
+              <a:buChar char="•"/>
+            </a:pPr>
+            <a:r>
+              <a:rPr lang="en-US" sz="1200" dirty="0">
+                <a:solidFill>
+                  <a:srgbClr val="2C2C2C"/>
+                </a:solidFill>
+                <a:latin typeface="Verdana" pitchFamily="34" charset="0"/>
+                <a:ea typeface="Verdana" pitchFamily="34" charset="-122"/>
+                <a:cs typeface="Verdana" pitchFamily="34" charset="-120"/>
+              </a:rPr>
+              <a:t>Find a "twin pair" — your card + a middle card that add to 10.</a:t>
+            </a:r>
+            <a:endParaRPr lang="en-US" sz="1200" dirty="0"/>
+          </a:p>
+          <a:p>
+            <a:pPr algn="l" marL="342900" indent="-342900">
+              <a:lnSpc>
+                <a:spcPts val="1620"/>
+              </a:lnSpc>
+              <a:spcAft>
+                <a:spcPts val="300"/>
+              </a:spcAft>
+              <a:buSzPct val="100000"/>
+              <a:buChar char="•"/>
+            </a:pPr>
+            <a:r>
+              <a:rPr lang="en-US" sz="1200" dirty="0">
+                <a:solidFill>
+                  <a:srgbClr val="2C2C2C"/>
+                </a:solidFill>
+                <a:latin typeface="Verdana" pitchFamily="34" charset="0"/>
+                <a:ea typeface="Verdana" pitchFamily="34" charset="-122"/>
+                <a:cs typeface="Verdana" pitchFamily="34" charset="-120"/>
+              </a:rPr>
+              <a:t>Take both. Put them in your "pile."</a:t>
+            </a:r>
+            <a:endParaRPr lang="en-US" sz="1200" dirty="0"/>
+          </a:p>
+          <a:p>
+            <a:pPr algn="l" marL="342900" indent="-342900">
+              <a:lnSpc>
+                <a:spcPts val="1620"/>
+              </a:lnSpc>
+              <a:spcAft>
+                <a:spcPts val="300"/>
+              </a:spcAft>
+              <a:buSzPct val="100000"/>
+              <a:buChar char="•"/>
+            </a:pPr>
+            <a:r>
+              <a:rPr lang="en-US" sz="1200" dirty="0">
+                <a:solidFill>
+                  <a:srgbClr val="2C2C2C"/>
+                </a:solidFill>
+                <a:latin typeface="Verdana" pitchFamily="34" charset="0"/>
+                <a:ea typeface="Verdana" pitchFamily="34" charset="-122"/>
+                <a:cs typeface="Verdana" pitchFamily="34" charset="-120"/>
+              </a:rPr>
+              <a:t>Draw a new card from the deck.</a:t>
+            </a:r>
+            <a:endParaRPr lang="en-US" sz="1200" dirty="0"/>
+          </a:p>
+        </p:txBody>
+      </p:sp>
+      <p:sp>
+        <p:nvSpPr>
+          <p:cNvPr id="6" name="Text 4"/>
+          <p:cNvSpPr/>
+          <p:nvPr/>
+        </p:nvSpPr>
+        <p:spPr>
+          <a:xfrm>
+            <a:off x="634901" y="2625477"/>
+            <a:ext cx="8102798" cy="525661"/>
+          </a:xfrm>
+          <a:prstGeom prst="rect">
+            <a:avLst/>
+          </a:prstGeom>
+          <a:noFill/>
+          <a:ln/>
+        </p:spPr>
+        <p:txBody>
+          <a:bodyPr wrap="square" lIns="0" tIns="0" rIns="0" bIns="0" rtlCol="0" anchor="t"/>
+          <a:lstStyle/>
+          <a:p>
+            <a:pPr algn="l" marL="342900" indent="-342900">
+              <a:lnSpc>
+                <a:spcPts val="1620"/>
+              </a:lnSpc>
+              <a:spcAft>
+                <a:spcPts val="300"/>
+              </a:spcAft>
+              <a:buSzPct val="100000"/>
+              <a:buChar char="•"/>
+            </a:pPr>
+            <a:r>
+              <a:rPr lang="en-US" sz="1200" dirty="0">
+                <a:solidFill>
+                  <a:srgbClr val="2C2C2C"/>
+                </a:solidFill>
+                <a:latin typeface="Verdana" pitchFamily="34" charset="0"/>
+                <a:ea typeface="Verdana" pitchFamily="34" charset="-122"/>
+                <a:cs typeface="Verdana" pitchFamily="34" charset="-120"/>
+              </a:rPr>
+              <a:t>If you can't find a twin, place 1 card in the middle. End your turn.</a:t>
+            </a:r>
+            <a:endParaRPr lang="en-US" sz="1200" dirty="0"/>
+          </a:p>
+          <a:p>
+            <a:pPr algn="l" marL="342900" indent="-342900">
+              <a:lnSpc>
+                <a:spcPts val="1620"/>
+              </a:lnSpc>
+              <a:spcAft>
+                <a:spcPts val="300"/>
+              </a:spcAft>
+              <a:buSzPct val="100000"/>
+              <a:buChar char="•"/>
+            </a:pPr>
+            <a:r>
+              <a:rPr lang="en-US" sz="1200" dirty="0">
+                <a:solidFill>
+                  <a:srgbClr val="2C2C2C"/>
+                </a:solidFill>
+                <a:latin typeface="Verdana" pitchFamily="34" charset="0"/>
+                <a:ea typeface="Verdana" pitchFamily="34" charset="-122"/>
+                <a:cs typeface="Verdana" pitchFamily="34" charset="-120"/>
+              </a:rPr>
+              <a:t>When the deck is empty, count pairs. Most pairs wins!</a:t>
+            </a:r>
+            <a:endParaRPr lang="en-US" sz="1200" dirty="0"/>
+          </a:p>
+        </p:txBody>
+      </p:sp>
+      <p:sp>
+        <p:nvSpPr>
+          <p:cNvPr id="7" name="Text 5"/>
           <p:cNvSpPr/>
           <p:nvPr/>
         </p:nvSpPr>
@@ -4193,7 +5058,7 @@
                 <a:ea typeface="Georgia" pitchFamily="34" charset="-122"/>
                 <a:cs typeface="Georgia" pitchFamily="34" charset="-120"/>
               </a:rPr>
-              <a:t>Differentiation</a:t>
+              <a:t>Game (17 min) (cont.)</a:t>
             </a:r>
             <a:endParaRPr lang="en-US" sz="1800" dirty="0"/>
           </a:p>
@@ -4207,8 +5072,8 @@
         </p:nvSpPr>
         <p:spPr>
           <a:xfrm>
-            <a:off x="634901" y="883593"/>
-            <a:ext cx="8102798" cy="525661"/>
+            <a:off x="406301" y="870942"/>
+            <a:ext cx="8498026" cy="213271"/>
           </a:xfrm>
           <a:prstGeom prst="rect">
             <a:avLst/>
@@ -4220,18 +5085,20 @@
           <a:bodyPr wrap="square" lIns="0" tIns="0" rIns="0" bIns="0" rtlCol="0" anchor="t"/>
           <a:lstStyle/>
           <a:p>
-            <a:pPr algn="l" marL="342900" indent="-342900">
-              <a:lnSpc>
-                <a:spcPts val="1620"/>
-              </a:lnSpc>
-              <a:spcAft>
-                <a:spcPts val="300"/>
-              </a:spcAft>
-              <a:buSzPct val="100000"/>
-              <a:buChar char="•"/>
-            </a:pPr>
-            <a:r>
-              <a:rPr lang="en-US" sz="1200" b="1" dirty="0">
+            <a:pPr algn="l" indent="0" marL="0">
+              <a:lnSpc>
+                <a:spcPts val="1680"/>
+              </a:lnSpc>
+              <a:spcBef>
+                <a:spcPts val="300"/>
+              </a:spcBef>
+              <a:spcAft>
+                <a:spcPts val="300"/>
+              </a:spcAft>
+              <a:buNone/>
+            </a:pPr>
+            <a:r>
+              <a:rPr lang="en-US" sz="1200" dirty="0">
                 <a:solidFill>
                   <a:srgbClr val="2C2C2C"/>
                 </a:solidFill>
@@ -4239,71 +5106,7 @@
                 <a:ea typeface="Verdana" pitchFamily="34" charset="-122"/>
                 <a:cs typeface="Verdana" pitchFamily="34" charset="-120"/>
               </a:rPr>
-              <a:t>Tier up:</a:t>
-            </a:r>
-            <a:pPr algn="l" indent="0" marL="0">
-              <a:lnSpc>
-                <a:spcPts val="1620"/>
-              </a:lnSpc>
-              <a:spcAft>
-                <a:spcPts val="300"/>
-              </a:spcAft>
-              <a:buNone/>
-            </a:pPr>
-            <a:r>
-              <a:rPr lang="en-US" sz="1200" dirty="0">
-                <a:solidFill>
-                  <a:srgbClr val="2C2C2C"/>
-                </a:solidFill>
-                <a:latin typeface="Verdana" pitchFamily="34" charset="0"/>
-                <a:ea typeface="Verdana" pitchFamily="34" charset="-122"/>
-                <a:cs typeface="Verdana" pitchFamily="34" charset="-120"/>
-              </a:rPr>
-              <a:t> Add cards 0 and 10. Find twins for those too. (0 + 10. Or just play with 1–9.)</a:t>
-            </a:r>
-            <a:endParaRPr lang="en-US" sz="1200" dirty="0"/>
-          </a:p>
-          <a:p>
-            <a:pPr algn="l" marL="342900" indent="-342900">
-              <a:lnSpc>
-                <a:spcPts val="1620"/>
-              </a:lnSpc>
-              <a:spcAft>
-                <a:spcPts val="300"/>
-              </a:spcAft>
-              <a:buSzPct val="100000"/>
-              <a:buChar char="•"/>
-            </a:pPr>
-            <a:r>
-              <a:rPr lang="en-US" sz="1200" b="1" dirty="0">
-                <a:solidFill>
-                  <a:srgbClr val="2C2C2C"/>
-                </a:solidFill>
-                <a:latin typeface="Verdana" pitchFamily="34" charset="0"/>
-                <a:ea typeface="Verdana" pitchFamily="34" charset="-122"/>
-                <a:cs typeface="Verdana" pitchFamily="34" charset="-120"/>
-              </a:rPr>
-              <a:t>Tier down:</a:t>
-            </a:r>
-            <a:pPr algn="l" indent="0" marL="0">
-              <a:lnSpc>
-                <a:spcPts val="1620"/>
-              </a:lnSpc>
-              <a:spcAft>
-                <a:spcPts val="300"/>
-              </a:spcAft>
-              <a:buNone/>
-            </a:pPr>
-            <a:r>
-              <a:rPr lang="en-US" sz="1200" dirty="0">
-                <a:solidFill>
-                  <a:srgbClr val="2C2C2C"/>
-                </a:solidFill>
-                <a:latin typeface="Verdana" pitchFamily="34" charset="0"/>
-                <a:ea typeface="Verdana" pitchFamily="34" charset="-122"/>
-                <a:cs typeface="Verdana" pitchFamily="34" charset="-120"/>
-              </a:rPr>
-              <a:t> Use only cards 1–6 to keep the twins easy.</a:t>
+              <a:t>Play 2 rounds.</a:t>
             </a:r>
             <a:endParaRPr lang="en-US" sz="1200" dirty="0"/>
           </a:p>
